--- a/Lectures/Lecture4.pptx
+++ b/Lectures/Lecture4.pptx
@@ -315,7 +315,7 @@
           <a:p>
             <a:fld id="{CBA08D16-15DC-4E25-BDC3-F25146157B16}" type="datetimeFigureOut">
               <a:rPr lang="ru-RU" smtClean="0"/>
-              <a:t>01.10.2025</a:t>
+              <a:t>30.09.2026</a:t>
             </a:fld>
             <a:endParaRPr lang="ru-RU"/>
           </a:p>
@@ -711,7 +711,7 @@
           <a:p>
             <a:fld id="{FCEC8293-DB51-454A-BE81-EC8FCB31EBA2}" type="datetime1">
               <a:rPr lang="ru-RU" smtClean="0"/>
-              <a:t>01.10.2025</a:t>
+              <a:t>30.09.2026</a:t>
             </a:fld>
             <a:endParaRPr lang="ru-RU"/>
           </a:p>
@@ -882,7 +882,7 @@
           <a:p>
             <a:fld id="{241C87B1-1C35-4DBD-BC18-2BC72E776603}" type="datetime1">
               <a:rPr lang="ru-RU" smtClean="0"/>
-              <a:t>01.10.2025</a:t>
+              <a:t>30.09.2026</a:t>
             </a:fld>
             <a:endParaRPr lang="ru-RU"/>
           </a:p>
@@ -1063,7 +1063,7 @@
           <a:p>
             <a:fld id="{3134C275-26C0-42CD-9111-9ADE65922AF9}" type="datetime1">
               <a:rPr lang="ru-RU" smtClean="0"/>
-              <a:t>01.10.2025</a:t>
+              <a:t>30.09.2026</a:t>
             </a:fld>
             <a:endParaRPr lang="ru-RU"/>
           </a:p>
@@ -1234,7 +1234,7 @@
           <a:p>
             <a:fld id="{C1A9A50B-C350-45F5-8AAB-ADB9E670AF2E}" type="datetime1">
               <a:rPr lang="ru-RU" smtClean="0"/>
-              <a:t>01.10.2025</a:t>
+              <a:t>30.09.2026</a:t>
             </a:fld>
             <a:endParaRPr lang="ru-RU"/>
           </a:p>
@@ -1482,7 +1482,7 @@
           <a:p>
             <a:fld id="{089688C9-348F-42F9-B6C0-5990DDE0C5B2}" type="datetime1">
               <a:rPr lang="ru-RU" smtClean="0"/>
-              <a:t>01.10.2025</a:t>
+              <a:t>30.09.2026</a:t>
             </a:fld>
             <a:endParaRPr lang="ru-RU"/>
           </a:p>
@@ -1714,7 +1714,7 @@
           <a:p>
             <a:fld id="{684AFD8F-6DD9-4AD3-A505-FDC3F5C5F3F6}" type="datetime1">
               <a:rPr lang="ru-RU" smtClean="0"/>
-              <a:t>01.10.2025</a:t>
+              <a:t>30.09.2026</a:t>
             </a:fld>
             <a:endParaRPr lang="ru-RU"/>
           </a:p>
@@ -2081,7 +2081,7 @@
           <a:p>
             <a:fld id="{63551EFE-4D02-45EB-A747-8B6F047B5AA0}" type="datetime1">
               <a:rPr lang="ru-RU" smtClean="0"/>
-              <a:t>01.10.2025</a:t>
+              <a:t>30.09.2026</a:t>
             </a:fld>
             <a:endParaRPr lang="ru-RU"/>
           </a:p>
@@ -2201,7 +2201,7 @@
           <a:p>
             <a:fld id="{813A9F34-E5CD-4B8F-AA9E-889C84372B20}" type="datetime1">
               <a:rPr lang="ru-RU" smtClean="0"/>
-              <a:t>01.10.2025</a:t>
+              <a:t>30.09.2026</a:t>
             </a:fld>
             <a:endParaRPr lang="ru-RU"/>
           </a:p>
@@ -2299,7 +2299,7 @@
           <a:p>
             <a:fld id="{51224D22-9B29-44A6-8E82-95FC492DEDC1}" type="datetime1">
               <a:rPr lang="ru-RU" smtClean="0"/>
-              <a:t>01.10.2025</a:t>
+              <a:t>30.09.2026</a:t>
             </a:fld>
             <a:endParaRPr lang="ru-RU"/>
           </a:p>
@@ -2577,7 +2577,7 @@
           <a:p>
             <a:fld id="{91D1034F-4441-48A1-BDC0-25EA1022324A}" type="datetime1">
               <a:rPr lang="ru-RU" smtClean="0"/>
-              <a:t>01.10.2025</a:t>
+              <a:t>30.09.2026</a:t>
             </a:fld>
             <a:endParaRPr lang="ru-RU"/>
           </a:p>
@@ -2832,7 +2832,7 @@
           <a:p>
             <a:fld id="{B0FFDE79-B627-473B-AE17-4C65BD2495F7}" type="datetime1">
               <a:rPr lang="ru-RU" smtClean="0"/>
-              <a:t>01.10.2025</a:t>
+              <a:t>30.09.2026</a:t>
             </a:fld>
             <a:endParaRPr lang="ru-RU"/>
           </a:p>
@@ -3046,7 +3046,7 @@
           <a:p>
             <a:fld id="{11CA537A-1B8C-47BA-9BA6-7CE3FAFDA8BE}" type="datetime1">
               <a:rPr lang="ru-RU" smtClean="0"/>
-              <a:t>01.10.2025</a:t>
+              <a:t>30.09.2026</a:t>
             </a:fld>
             <a:endParaRPr lang="ru-RU"/>
           </a:p>
@@ -3530,46 +3530,11 @@
           <a:p>
             <a:r>
               <a:rPr lang="ru-RU" dirty="0"/>
-              <a:t>МИФИ 202</a:t>
+              <a:t>МИФИ 2026</a:t>
             </a:r>
-            <a:r>
-              <a:rPr lang="en-US" dirty="0"/>
-              <a:t>5</a:t>
-            </a:r>
-            <a:endParaRPr lang="ru-RU" dirty="0"/>
           </a:p>
         </p:txBody>
       </p:sp>
-      <p:pic>
-        <p:nvPicPr>
-          <p:cNvPr id="4" name="Рисунок 3">
-            <a:extLst>
-              <a:ext uri="{FF2B5EF4-FFF2-40B4-BE49-F238E27FC236}">
-                <a16:creationId xmlns:a16="http://schemas.microsoft.com/office/drawing/2014/main" id="{8AB7E4BA-410A-4BB0-9467-CF329E8B1084}"/>
-              </a:ext>
-            </a:extLst>
-          </p:cNvPr>
-          <p:cNvPicPr>
-            <a:picLocks noChangeAspect="1"/>
-          </p:cNvPicPr>
-          <p:nvPr/>
-        </p:nvPicPr>
-        <p:blipFill>
-          <a:blip r:embed="rId2"/>
-          <a:stretch>
-            <a:fillRect/>
-          </a:stretch>
-        </p:blipFill>
-        <p:spPr>
-          <a:xfrm>
-            <a:off x="10006584" y="2475357"/>
-            <a:ext cx="1524000" cy="1504950"/>
-          </a:xfrm>
-          <a:prstGeom prst="rect">
-            <a:avLst/>
-          </a:prstGeom>
-        </p:spPr>
-      </p:pic>
       <p:sp>
         <p:nvSpPr>
           <p:cNvPr id="5" name="TextBox 4">
@@ -3584,7 +3549,7 @@
         </p:nvSpPr>
         <p:spPr>
           <a:xfrm>
-            <a:off x="9800844" y="3980307"/>
+            <a:off x="9634910" y="6165543"/>
             <a:ext cx="1935480" cy="646331"/>
           </a:xfrm>
           <a:prstGeom prst="rect">
@@ -3606,6 +3571,36 @@
           </a:p>
         </p:txBody>
       </p:sp>
+      <p:pic>
+        <p:nvPicPr>
+          <p:cNvPr id="6" name="Рисунок 5">
+            <a:extLst>
+              <a:ext uri="{FF2B5EF4-FFF2-40B4-BE49-F238E27FC236}">
+                <a16:creationId xmlns:a16="http://schemas.microsoft.com/office/drawing/2014/main" id="{4A879BB4-89C1-473F-B87B-8E82B88DDE9B}"/>
+              </a:ext>
+            </a:extLst>
+          </p:cNvPr>
+          <p:cNvPicPr>
+            <a:picLocks noChangeAspect="1"/>
+          </p:cNvPicPr>
+          <p:nvPr/>
+        </p:nvPicPr>
+        <p:blipFill>
+          <a:blip r:embed="rId2"/>
+          <a:stretch>
+            <a:fillRect/>
+          </a:stretch>
+        </p:blipFill>
+        <p:spPr>
+          <a:xfrm>
+            <a:off x="9646340" y="4328906"/>
+            <a:ext cx="1924050" cy="1924050"/>
+          </a:xfrm>
+          <a:prstGeom prst="rect">
+            <a:avLst/>
+          </a:prstGeom>
+        </p:spPr>
+      </p:pic>
     </p:spTree>
     <p:extLst>
       <p:ext uri="{BB962C8B-B14F-4D97-AF65-F5344CB8AC3E}">
@@ -3658,8 +3653,8 @@
           </a:p>
         </p:txBody>
       </p:sp>
-      <mc:AlternateContent xmlns:mc="http://schemas.openxmlformats.org/markup-compatibility/2006" xmlns:a14="http://schemas.microsoft.com/office/drawing/2010/main">
-        <mc:Choice Requires="a14">
+      <mc:AlternateContent xmlns:mc="http://schemas.openxmlformats.org/markup-compatibility/2006">
+        <mc:Choice xmlns:a14="http://schemas.microsoft.com/office/drawing/2010/main" Requires="a14">
           <p:sp>
             <p:nvSpPr>
               <p:cNvPr id="3" name="Объект 2"/>
@@ -3869,6 +3864,10 @@
                     </m:sSup>
                   </m:oMath>
                 </a14:m>
+                <a:r>
+                  <a:rPr lang="en-US" dirty="0"/>
+                  <a:t> </a:t>
+                </a:r>
                 <a:r>
                   <a:rPr lang="ru-RU" dirty="0"/>
                   <a:t>ли стойкой </a:t>
@@ -4199,31 +4198,40 @@
                     <m:sSub>
                       <m:sSubPr>
                         <m:ctrlPr>
-                          <a:rPr lang="en-US" b="0" i="1" smtClean="0">
+                          <a:rPr lang="en-US" b="0" smtClean="0">
                             <a:latin typeface="Cambria Math" panose="02040503050406030204" pitchFamily="18" charset="0"/>
                           </a:rPr>
                         </m:ctrlPr>
                       </m:sSubPr>
                       <m:e>
                         <m:r>
-                          <a:rPr lang="en-US" i="1">
-                            <a:latin typeface="Cambria Math" panose="02040503050406030204" pitchFamily="18" charset="0"/>
-                          </a:rPr>
-                          <m:t>𝑃</m:t>
+                          <m:rPr>
+                            <m:sty m:val="p"/>
+                          </m:rPr>
+                          <a:rPr lang="en-US" i="0">
+                            <a:latin typeface="Cambria Math" panose="02040503050406030204" pitchFamily="18" charset="0"/>
+                          </a:rPr>
+                          <m:t>P</m:t>
                         </m:r>
                         <m:r>
-                          <a:rPr lang="en-US" b="0" i="1" smtClean="0">
-                            <a:latin typeface="Cambria Math" panose="02040503050406030204" pitchFamily="18" charset="0"/>
-                          </a:rPr>
-                          <m:t>𝑅𝐹</m:t>
+                          <m:rPr>
+                            <m:sty m:val="p"/>
+                          </m:rPr>
+                          <a:rPr lang="en-US" b="0" i="0" smtClean="0">
+                            <a:latin typeface="Cambria Math" panose="02040503050406030204" pitchFamily="18" charset="0"/>
+                          </a:rPr>
+                          <m:t>RF</m:t>
                         </m:r>
                       </m:e>
                       <m:sub>
                         <m:r>
-                          <a:rPr lang="en-US" b="0" i="1" smtClean="0">
-                            <a:latin typeface="Cambria Math" panose="02040503050406030204" pitchFamily="18" charset="0"/>
-                          </a:rPr>
-                          <m:t>𝑎𝑑𝑣</m:t>
+                          <m:rPr>
+                            <m:sty m:val="p"/>
+                          </m:rPr>
+                          <a:rPr lang="en-US" b="0" i="0" smtClean="0">
+                            <a:latin typeface="Cambria Math" panose="02040503050406030204" pitchFamily="18" charset="0"/>
+                          </a:rPr>
+                          <m:t>adv</m:t>
                         </m:r>
                       </m:sub>
                     </m:sSub>
@@ -4327,7 +4335,7 @@
             </p:txBody>
           </p:sp>
         </mc:Choice>
-        <mc:Fallback xmlns="">
+        <mc:Fallback>
           <p:sp>
             <p:nvSpPr>
               <p:cNvPr id="3" name="Объект 2"/>
@@ -4339,7 +4347,7 @@
               </p:nvPr>
             </p:nvSpPr>
             <p:spPr>
-              <a:blipFill rotWithShape="0">
+              <a:blipFill>
                 <a:blip r:embed="rId2"/>
                 <a:stretch>
                   <a:fillRect l="-1043" t="-1961"/>
@@ -4441,8 +4449,8 @@
           </a:p>
         </p:txBody>
       </p:sp>
-      <mc:AlternateContent xmlns:mc="http://schemas.openxmlformats.org/markup-compatibility/2006" xmlns:a14="http://schemas.microsoft.com/office/drawing/2010/main">
-        <mc:Choice Requires="a14">
+      <mc:AlternateContent xmlns:mc="http://schemas.openxmlformats.org/markup-compatibility/2006">
+        <mc:Choice xmlns:a14="http://schemas.microsoft.com/office/drawing/2010/main" Requires="a14">
           <p:sp>
             <p:nvSpPr>
               <p:cNvPr id="3" name="Объект 2"/>
@@ -4627,25 +4635,31 @@
                     <m:sSub>
                       <m:sSubPr>
                         <m:ctrlPr>
-                          <a:rPr lang="en-US" b="0" i="1" smtClean="0">
+                          <a:rPr lang="en-US" b="0" smtClean="0">
                             <a:latin typeface="Cambria Math" panose="02040503050406030204" pitchFamily="18" charset="0"/>
                           </a:rPr>
                         </m:ctrlPr>
                       </m:sSubPr>
                       <m:e>
                         <m:r>
-                          <a:rPr lang="en-US" b="0" i="1" smtClean="0">
-                            <a:latin typeface="Cambria Math" panose="02040503050406030204" pitchFamily="18" charset="0"/>
-                          </a:rPr>
-                          <m:t>𝑃𝑅𝑃</m:t>
+                          <m:rPr>
+                            <m:sty m:val="p"/>
+                          </m:rPr>
+                          <a:rPr lang="en-US" b="0" i="0" smtClean="0">
+                            <a:latin typeface="Cambria Math" panose="02040503050406030204" pitchFamily="18" charset="0"/>
+                          </a:rPr>
+                          <m:t>PRP</m:t>
                         </m:r>
                       </m:e>
                       <m:sub>
                         <m:r>
-                          <a:rPr lang="en-US" b="0" i="1" smtClean="0">
-                            <a:latin typeface="Cambria Math" panose="02040503050406030204" pitchFamily="18" charset="0"/>
-                          </a:rPr>
-                          <m:t>𝑎𝑑𝑣</m:t>
+                          <m:rPr>
+                            <m:sty m:val="p"/>
+                          </m:rPr>
+                          <a:rPr lang="en-US" b="0" i="0" smtClean="0">
+                            <a:latin typeface="Cambria Math" panose="02040503050406030204" pitchFamily="18" charset="0"/>
+                          </a:rPr>
+                          <m:t>adv</m:t>
                         </m:r>
                       </m:sub>
                     </m:sSub>
@@ -4808,7 +4822,7 @@
             </p:txBody>
           </p:sp>
         </mc:Choice>
-        <mc:Fallback xmlns="">
+        <mc:Fallback>
           <p:sp>
             <p:nvSpPr>
               <p:cNvPr id="3" name="Объект 2"/>
@@ -6993,8 +7007,8 @@
           </a:p>
         </p:txBody>
       </p:sp>
-      <mc:AlternateContent xmlns:mc="http://schemas.openxmlformats.org/markup-compatibility/2006" xmlns:a14="http://schemas.microsoft.com/office/drawing/2010/main">
-        <mc:Choice Requires="a14">
+      <mc:AlternateContent xmlns:mc="http://schemas.openxmlformats.org/markup-compatibility/2006">
+        <mc:Choice xmlns:a14="http://schemas.microsoft.com/office/drawing/2010/main" Requires="a14">
           <p:sp>
             <p:nvSpPr>
               <p:cNvPr id="3" name="Объект 2"/>
@@ -7127,25 +7141,31 @@
                     <m:sSub>
                       <m:sSubPr>
                         <m:ctrlPr>
-                          <a:rPr lang="en-US" b="0" i="1" smtClean="0">
+                          <a:rPr lang="en-US" b="0" smtClean="0">
                             <a:latin typeface="Cambria Math" panose="02040503050406030204" pitchFamily="18" charset="0"/>
                           </a:rPr>
                         </m:ctrlPr>
                       </m:sSubPr>
                       <m:e>
                         <m:r>
-                          <a:rPr lang="en-US" b="0" i="1" smtClean="0">
-                            <a:latin typeface="Cambria Math" panose="02040503050406030204" pitchFamily="18" charset="0"/>
-                          </a:rPr>
-                          <m:t>𝑃𝑅𝑃</m:t>
+                          <m:rPr>
+                            <m:sty m:val="p"/>
+                          </m:rPr>
+                          <a:rPr lang="en-US" b="0" i="0" smtClean="0">
+                            <a:latin typeface="Cambria Math" panose="02040503050406030204" pitchFamily="18" charset="0"/>
+                          </a:rPr>
+                          <m:t>PRP</m:t>
                         </m:r>
                       </m:e>
                       <m:sub>
                         <m:r>
-                          <a:rPr lang="en-US" b="0" i="1" smtClean="0">
-                            <a:latin typeface="Cambria Math" panose="02040503050406030204" pitchFamily="18" charset="0"/>
-                          </a:rPr>
-                          <m:t>𝑎𝑑𝑣</m:t>
+                          <m:rPr>
+                            <m:sty m:val="p"/>
+                          </m:rPr>
+                          <a:rPr lang="en-US" b="0" i="0" smtClean="0">
+                            <a:latin typeface="Cambria Math" panose="02040503050406030204" pitchFamily="18" charset="0"/>
+                          </a:rPr>
+                          <m:t>adv</m:t>
                         </m:r>
                       </m:sub>
                     </m:sSub>
@@ -7230,7 +7250,7 @@
             </p:txBody>
           </p:sp>
         </mc:Choice>
-        <mc:Fallback xmlns="">
+        <mc:Fallback>
           <p:sp>
             <p:nvSpPr>
               <p:cNvPr id="3" name="Объект 2"/>
@@ -8871,8 +8891,8 @@
           </p:sp>
         </mc:Fallback>
       </mc:AlternateContent>
-      <mc:AlternateContent xmlns:mc="http://schemas.openxmlformats.org/markup-compatibility/2006" xmlns:a14="http://schemas.microsoft.com/office/drawing/2010/main">
-        <mc:Choice Requires="a14">
+      <mc:AlternateContent xmlns:mc="http://schemas.openxmlformats.org/markup-compatibility/2006">
+        <mc:Choice xmlns:a14="http://schemas.microsoft.com/office/drawing/2010/main" Requires="a14">
           <p:sp>
             <p:nvSpPr>
               <p:cNvPr id="5" name="Прямоугольник 4"/>
@@ -8904,25 +8924,31 @@
                       <m:sSub>
                         <m:sSubPr>
                           <m:ctrlPr>
-                            <a:rPr lang="en-US" sz="2400" i="1" smtClean="0">
+                            <a:rPr lang="en-US" sz="2400" smtClean="0">
                               <a:latin typeface="Cambria Math" panose="02040503050406030204" pitchFamily="18" charset="0"/>
                             </a:rPr>
                           </m:ctrlPr>
                         </m:sSubPr>
                         <m:e>
                           <m:r>
-                            <a:rPr lang="en-US" sz="2400" b="0" i="1" smtClean="0">
+                            <m:rPr>
+                              <m:sty m:val="p"/>
+                            </m:rPr>
+                            <a:rPr lang="en-US" sz="2400" b="0" i="0" smtClean="0">
                               <a:latin typeface="Cambria Math" panose="02040503050406030204" pitchFamily="18" charset="0"/>
                             </a:rPr>
-                            <m:t>𝑃𝑅𝑃</m:t>
+                            <m:t>PRP</m:t>
                           </m:r>
                         </m:e>
                         <m:sub>
                           <m:r>
-                            <a:rPr lang="en-US" sz="2400" i="1">
+                            <m:rPr>
+                              <m:sty m:val="p"/>
+                            </m:rPr>
+                            <a:rPr lang="en-US" sz="2400" i="0">
                               <a:latin typeface="Cambria Math" panose="02040503050406030204" pitchFamily="18" charset="0"/>
                             </a:rPr>
-                            <m:t>𝑎𝑑𝑣</m:t>
+                            <m:t>adv</m:t>
                           </m:r>
                         </m:sub>
                       </m:sSub>
@@ -9086,7 +9112,7 @@
             </p:txBody>
           </p:sp>
         </mc:Choice>
-        <mc:Fallback xmlns="">
+        <mc:Fallback>
           <p:sp>
             <p:nvSpPr>
               <p:cNvPr id="5" name="Прямоугольник 4"/>
@@ -9182,8 +9208,8 @@
           </a:p>
         </p:txBody>
       </p:sp>
-      <mc:AlternateContent xmlns:mc="http://schemas.openxmlformats.org/markup-compatibility/2006" xmlns:a14="http://schemas.microsoft.com/office/drawing/2010/main">
-        <mc:Choice Requires="a14">
+      <mc:AlternateContent xmlns:mc="http://schemas.openxmlformats.org/markup-compatibility/2006">
+        <mc:Choice xmlns:a14="http://schemas.microsoft.com/office/drawing/2010/main" Requires="a14">
           <p:sp>
             <p:nvSpPr>
               <p:cNvPr id="3" name="Объект 2"/>
@@ -9258,38 +9284,47 @@
                 <a14:m>
                   <m:oMath xmlns:m="http://schemas.openxmlformats.org/officeDocument/2006/math">
                     <m:r>
-                      <a:rPr lang="en-US" b="0" i="1" smtClean="0">
-                        <a:latin typeface="Cambria Math" panose="02040503050406030204" pitchFamily="18" charset="0"/>
-                      </a:rPr>
-                      <m:t>𝑃𝑅</m:t>
+                      <m:rPr>
+                        <m:sty m:val="p"/>
+                      </m:rPr>
+                      <a:rPr lang="en-US" b="0" i="0" smtClean="0">
+                        <a:latin typeface="Cambria Math" panose="02040503050406030204" pitchFamily="18" charset="0"/>
+                      </a:rPr>
+                      <m:t>PR</m:t>
                     </m:r>
                     <m:sSubSup>
                       <m:sSubSupPr>
                         <m:ctrlPr>
-                          <a:rPr lang="ru-RU" b="0" i="1" smtClean="0">
+                          <a:rPr lang="ru-RU" b="0" smtClean="0">
                             <a:latin typeface="Cambria Math" panose="02040503050406030204" pitchFamily="18" charset="0"/>
                           </a:rPr>
                         </m:ctrlPr>
                       </m:sSubSupPr>
                       <m:e>
                         <m:r>
-                          <a:rPr lang="en-US" b="0" i="1" smtClean="0">
-                            <a:latin typeface="Cambria Math" panose="02040503050406030204" pitchFamily="18" charset="0"/>
-                          </a:rPr>
-                          <m:t>𝑃</m:t>
+                          <m:rPr>
+                            <m:sty m:val="p"/>
+                          </m:rPr>
+                          <a:rPr lang="en-US" b="0" i="0" smtClean="0">
+                            <a:latin typeface="Cambria Math" panose="02040503050406030204" pitchFamily="18" charset="0"/>
+                          </a:rPr>
+                          <m:t>P</m:t>
                         </m:r>
                       </m:e>
                       <m:sub>
                         <m:r>
-                          <a:rPr lang="en-US" b="0" i="1" smtClean="0">
-                            <a:latin typeface="Cambria Math" panose="02040503050406030204" pitchFamily="18" charset="0"/>
-                          </a:rPr>
-                          <m:t>𝑎𝑑𝑣</m:t>
+                          <m:rPr>
+                            <m:sty m:val="p"/>
+                          </m:rPr>
+                          <a:rPr lang="en-US" b="0" i="0" smtClean="0">
+                            <a:latin typeface="Cambria Math" panose="02040503050406030204" pitchFamily="18" charset="0"/>
+                          </a:rPr>
+                          <m:t>adv</m:t>
                         </m:r>
                       </m:sub>
                       <m:sup>
                         <m:r>
-                          <a:rPr lang="ru-RU" b="0" i="1" smtClean="0">
+                          <a:rPr lang="ru-RU" b="0" i="0" smtClean="0">
                             <a:latin typeface="Cambria Math" panose="02040503050406030204" pitchFamily="18" charset="0"/>
                           </a:rPr>
                           <m:t>∗</m:t>
@@ -9484,36 +9519,45 @@
                     <m:sSubSup>
                       <m:sSubSupPr>
                         <m:ctrlPr>
-                          <a:rPr lang="en-US" b="0" i="1" smtClean="0">
+                          <a:rPr lang="en-US" b="0" smtClean="0">
                             <a:latin typeface="Cambria Math" panose="02040503050406030204" pitchFamily="18" charset="0"/>
                           </a:rPr>
                         </m:ctrlPr>
                       </m:sSubSupPr>
                       <m:e>
                         <m:r>
-                          <a:rPr lang="en-US" i="1">
-                            <a:latin typeface="Cambria Math" panose="02040503050406030204" pitchFamily="18" charset="0"/>
-                          </a:rPr>
-                          <m:t>𝑃𝑅</m:t>
+                          <m:rPr>
+                            <m:sty m:val="p"/>
+                          </m:rPr>
+                          <a:rPr lang="en-US" i="0">
+                            <a:latin typeface="Cambria Math" panose="02040503050406030204" pitchFamily="18" charset="0"/>
+                          </a:rPr>
+                          <m:t>PR</m:t>
                         </m:r>
                         <m:r>
-                          <a:rPr lang="en-US" b="0" i="1" smtClean="0">
-                            <a:latin typeface="Cambria Math" panose="02040503050406030204" pitchFamily="18" charset="0"/>
-                          </a:rPr>
-                          <m:t>𝑃</m:t>
+                          <m:rPr>
+                            <m:sty m:val="p"/>
+                          </m:rPr>
+                          <a:rPr lang="en-US" b="0" i="0" smtClean="0">
+                            <a:latin typeface="Cambria Math" panose="02040503050406030204" pitchFamily="18" charset="0"/>
+                          </a:rPr>
+                          <m:t>P</m:t>
                         </m:r>
                       </m:e>
                       <m:sub>
                         <m:r>
-                          <a:rPr lang="en-US" i="1">
-                            <a:latin typeface="Cambria Math" panose="02040503050406030204" pitchFamily="18" charset="0"/>
-                          </a:rPr>
-                          <m:t>𝑎𝑑𝑣</m:t>
+                          <m:rPr>
+                            <m:sty m:val="p"/>
+                          </m:rPr>
+                          <a:rPr lang="en-US" i="0">
+                            <a:latin typeface="Cambria Math" panose="02040503050406030204" pitchFamily="18" charset="0"/>
+                          </a:rPr>
+                          <m:t>adv</m:t>
                         </m:r>
                       </m:sub>
                       <m:sup>
                         <m:r>
-                          <a:rPr lang="en-US" b="0" i="1" smtClean="0">
+                          <a:rPr lang="en-US" b="0" i="0" smtClean="0">
                             <a:latin typeface="Cambria Math" panose="02040503050406030204" pitchFamily="18" charset="0"/>
                           </a:rPr>
                           <m:t>∗</m:t>
@@ -9598,31 +9642,40 @@
                     <m:sSubSup>
                       <m:sSubSupPr>
                         <m:ctrlPr>
-                          <a:rPr lang="en-US" i="1">
+                          <a:rPr lang="en-US">
                             <a:latin typeface="Cambria Math" panose="02040503050406030204" pitchFamily="18" charset="0"/>
                           </a:rPr>
                         </m:ctrlPr>
                       </m:sSubSupPr>
                       <m:e>
                         <m:r>
-                          <a:rPr lang="en-US" i="1">
-                            <a:latin typeface="Cambria Math" panose="02040503050406030204" pitchFamily="18" charset="0"/>
-                          </a:rPr>
-                          <m:t>𝑃𝑅</m:t>
+                          <m:rPr>
+                            <m:sty m:val="p"/>
+                          </m:rPr>
+                          <a:rPr lang="en-US" i="0">
+                            <a:latin typeface="Cambria Math" panose="02040503050406030204" pitchFamily="18" charset="0"/>
+                          </a:rPr>
+                          <m:t>PR</m:t>
                         </m:r>
                         <m:r>
-                          <a:rPr lang="en-US" b="0" i="1" smtClean="0">
-                            <a:latin typeface="Cambria Math" panose="02040503050406030204" pitchFamily="18" charset="0"/>
-                          </a:rPr>
-                          <m:t>𝑃</m:t>
+                          <m:rPr>
+                            <m:sty m:val="p"/>
+                          </m:rPr>
+                          <a:rPr lang="en-US" b="0" i="0" smtClean="0">
+                            <a:latin typeface="Cambria Math" panose="02040503050406030204" pitchFamily="18" charset="0"/>
+                          </a:rPr>
+                          <m:t>P</m:t>
                         </m:r>
                       </m:e>
                       <m:sub>
                         <m:r>
-                          <a:rPr lang="en-US" i="1">
-                            <a:latin typeface="Cambria Math" panose="02040503050406030204" pitchFamily="18" charset="0"/>
-                          </a:rPr>
-                          <m:t>𝑎𝑑𝑣</m:t>
+                          <m:rPr>
+                            <m:sty m:val="p"/>
+                          </m:rPr>
+                          <a:rPr lang="en-US" i="0">
+                            <a:latin typeface="Cambria Math" panose="02040503050406030204" pitchFamily="18" charset="0"/>
+                          </a:rPr>
+                          <m:t>adv</m:t>
                         </m:r>
                       </m:sub>
                       <m:sup/>
@@ -9667,36 +9720,45 @@
                     <m:sSubSup>
                       <m:sSubSupPr>
                         <m:ctrlPr>
-                          <a:rPr lang="en-US" i="1">
+                          <a:rPr lang="en-US">
                             <a:latin typeface="Cambria Math" panose="02040503050406030204" pitchFamily="18" charset="0"/>
                           </a:rPr>
                         </m:ctrlPr>
                       </m:sSubSupPr>
                       <m:e>
                         <m:r>
-                          <a:rPr lang="en-US" i="1">
-                            <a:latin typeface="Cambria Math" panose="02040503050406030204" pitchFamily="18" charset="0"/>
-                          </a:rPr>
-                          <m:t>𝑃𝑅</m:t>
+                          <m:rPr>
+                            <m:sty m:val="p"/>
+                          </m:rPr>
+                          <a:rPr lang="en-US" i="0">
+                            <a:latin typeface="Cambria Math" panose="02040503050406030204" pitchFamily="18" charset="0"/>
+                          </a:rPr>
+                          <m:t>PR</m:t>
                         </m:r>
                         <m:r>
-                          <a:rPr lang="en-US" b="0" i="1" smtClean="0">
-                            <a:latin typeface="Cambria Math" panose="02040503050406030204" pitchFamily="18" charset="0"/>
-                          </a:rPr>
-                          <m:t>𝑃</m:t>
+                          <m:rPr>
+                            <m:sty m:val="p"/>
+                          </m:rPr>
+                          <a:rPr lang="en-US" b="0" i="0" smtClean="0">
+                            <a:latin typeface="Cambria Math" panose="02040503050406030204" pitchFamily="18" charset="0"/>
+                          </a:rPr>
+                          <m:t>P</m:t>
                         </m:r>
                       </m:e>
                       <m:sub>
                         <m:r>
-                          <a:rPr lang="en-US" i="1">
-                            <a:latin typeface="Cambria Math" panose="02040503050406030204" pitchFamily="18" charset="0"/>
-                          </a:rPr>
-                          <m:t>𝑎𝑑𝑣</m:t>
+                          <m:rPr>
+                            <m:sty m:val="p"/>
+                          </m:rPr>
+                          <a:rPr lang="en-US" i="0">
+                            <a:latin typeface="Cambria Math" panose="02040503050406030204" pitchFamily="18" charset="0"/>
+                          </a:rPr>
+                          <m:t>adv</m:t>
                         </m:r>
                       </m:sub>
                       <m:sup>
                         <m:r>
-                          <a:rPr lang="en-US" b="0" i="1" smtClean="0">
+                          <a:rPr lang="en-US" b="0" i="0" smtClean="0">
                             <a:latin typeface="Cambria Math" panose="02040503050406030204" pitchFamily="18" charset="0"/>
                           </a:rPr>
                           <m:t>∗</m:t>
@@ -9755,7 +9817,7 @@
             </p:txBody>
           </p:sp>
         </mc:Choice>
-        <mc:Fallback xmlns="">
+        <mc:Fallback>
           <p:sp>
             <p:nvSpPr>
               <p:cNvPr id="3" name="Объект 2"/>
@@ -9774,7 +9836,7 @@
               <a:blipFill>
                 <a:blip r:embed="rId2"/>
                 <a:stretch>
-                  <a:fillRect l="-1043" t="-3902" b="-2439"/>
+                  <a:fillRect l="-1043" t="-3902" b="-2927"/>
                 </a:stretch>
               </a:blipFill>
             </p:spPr>
@@ -11442,8 +11504,8 @@
           </a:p>
         </p:txBody>
       </p:sp>
-      <mc:AlternateContent xmlns:mc="http://schemas.openxmlformats.org/markup-compatibility/2006" xmlns:a14="http://schemas.microsoft.com/office/drawing/2010/main">
-        <mc:Choice Requires="a14">
+      <mc:AlternateContent xmlns:mc="http://schemas.openxmlformats.org/markup-compatibility/2006">
+        <mc:Choice xmlns:a14="http://schemas.microsoft.com/office/drawing/2010/main" Requires="a14">
           <p:sp>
             <p:nvSpPr>
               <p:cNvPr id="3" name="Объект 2"/>
@@ -11651,33 +11713,42 @@
                 <a14:m>
                   <m:oMath xmlns:m="http://schemas.openxmlformats.org/officeDocument/2006/math">
                     <m:r>
-                      <a:rPr lang="en-US" b="0" i="1" smtClean="0">
-                        <a:latin typeface="Cambria Math" panose="02040503050406030204" pitchFamily="18" charset="0"/>
-                      </a:rPr>
-                      <m:t>𝐵</m:t>
+                      <m:rPr>
+                        <m:sty m:val="p"/>
+                      </m:rPr>
+                      <a:rPr lang="en-US" b="0" i="0" smtClean="0">
+                        <a:latin typeface="Cambria Math" panose="02040503050406030204" pitchFamily="18" charset="0"/>
+                      </a:rPr>
+                      <m:t>B</m:t>
                     </m:r>
                     <m:sSub>
                       <m:sSubPr>
                         <m:ctrlPr>
-                          <a:rPr lang="en-US" b="0" i="1" smtClean="0">
+                          <a:rPr lang="en-US" b="0" smtClean="0">
                             <a:latin typeface="Cambria Math" panose="02040503050406030204" pitchFamily="18" charset="0"/>
                           </a:rPr>
                         </m:ctrlPr>
                       </m:sSubPr>
                       <m:e>
                         <m:r>
-                          <a:rPr lang="en-US" b="0" i="1" smtClean="0">
-                            <a:latin typeface="Cambria Math" panose="02040503050406030204" pitchFamily="18" charset="0"/>
-                          </a:rPr>
-                          <m:t>𝐶</m:t>
+                          <m:rPr>
+                            <m:sty m:val="p"/>
+                          </m:rPr>
+                          <a:rPr lang="en-US" b="0" i="0" smtClean="0">
+                            <a:latin typeface="Cambria Math" panose="02040503050406030204" pitchFamily="18" charset="0"/>
+                          </a:rPr>
+                          <m:t>C</m:t>
                         </m:r>
                       </m:e>
                       <m:sub>
                         <m:r>
-                          <a:rPr lang="en-US" b="0" i="1" smtClean="0">
-                            <a:latin typeface="Cambria Math" panose="02040503050406030204" pitchFamily="18" charset="0"/>
-                          </a:rPr>
-                          <m:t>𝑎𝑑𝑣</m:t>
+                          <m:rPr>
+                            <m:sty m:val="p"/>
+                          </m:rPr>
+                          <a:rPr lang="en-US" b="0" i="0" smtClean="0">
+                            <a:latin typeface="Cambria Math" panose="02040503050406030204" pitchFamily="18" charset="0"/>
+                          </a:rPr>
+                          <m:t>adv</m:t>
                         </m:r>
                       </m:sub>
                     </m:sSub>
@@ -11722,33 +11793,42 @@
                       <m:t>=</m:t>
                     </m:r>
                     <m:r>
-                      <a:rPr lang="en-US" b="0" i="1" smtClean="0">
-                        <a:latin typeface="Cambria Math" panose="02040503050406030204" pitchFamily="18" charset="0"/>
-                      </a:rPr>
-                      <m:t>𝑃𝑅</m:t>
+                      <m:rPr>
+                        <m:sty m:val="p"/>
+                      </m:rPr>
+                      <a:rPr lang="en-US" b="0" i="0" smtClean="0">
+                        <a:latin typeface="Cambria Math" panose="02040503050406030204" pitchFamily="18" charset="0"/>
+                      </a:rPr>
+                      <m:t>PR</m:t>
                     </m:r>
                     <m:sSub>
                       <m:sSubPr>
                         <m:ctrlPr>
-                          <a:rPr lang="en-US" b="0" i="1" smtClean="0">
+                          <a:rPr lang="en-US" b="0" smtClean="0">
                             <a:latin typeface="Cambria Math" panose="02040503050406030204" pitchFamily="18" charset="0"/>
                           </a:rPr>
                         </m:ctrlPr>
                       </m:sSubPr>
                       <m:e>
                         <m:r>
-                          <a:rPr lang="en-US" b="0" i="1" smtClean="0">
-                            <a:latin typeface="Cambria Math" panose="02040503050406030204" pitchFamily="18" charset="0"/>
-                          </a:rPr>
-                          <m:t>𝑃</m:t>
+                          <m:rPr>
+                            <m:sty m:val="p"/>
+                          </m:rPr>
+                          <a:rPr lang="en-US" b="0" i="0" smtClean="0">
+                            <a:latin typeface="Cambria Math" panose="02040503050406030204" pitchFamily="18" charset="0"/>
+                          </a:rPr>
+                          <m:t>P</m:t>
                         </m:r>
                       </m:e>
                       <m:sub>
                         <m:r>
-                          <a:rPr lang="en-US" b="0" i="1" smtClean="0">
-                            <a:latin typeface="Cambria Math" panose="02040503050406030204" pitchFamily="18" charset="0"/>
-                          </a:rPr>
-                          <m:t>𝑎𝑑𝑣</m:t>
+                          <m:rPr>
+                            <m:sty m:val="p"/>
+                          </m:rPr>
+                          <a:rPr lang="en-US" b="0" i="0" smtClean="0">
+                            <a:latin typeface="Cambria Math" panose="02040503050406030204" pitchFamily="18" charset="0"/>
+                          </a:rPr>
+                          <m:t>adv</m:t>
                         </m:r>
                       </m:sub>
                     </m:sSub>
@@ -11829,7 +11909,7 @@
             </p:txBody>
           </p:sp>
         </mc:Choice>
-        <mc:Fallback xmlns="">
+        <mc:Fallback>
           <p:sp>
             <p:nvSpPr>
               <p:cNvPr id="3" name="Объект 2"/>
@@ -13460,8 +13540,8 @@
           </p:sp>
         </mc:Fallback>
       </mc:AlternateContent>
-      <mc:AlternateContent xmlns:mc="http://schemas.openxmlformats.org/markup-compatibility/2006" xmlns:a14="http://schemas.microsoft.com/office/drawing/2010/main">
-        <mc:Choice Requires="a14">
+      <mc:AlternateContent xmlns:mc="http://schemas.openxmlformats.org/markup-compatibility/2006">
+        <mc:Choice xmlns:a14="http://schemas.microsoft.com/office/drawing/2010/main" Requires="a14">
           <p:sp>
             <p:nvSpPr>
               <p:cNvPr id="27" name="Прямоугольник 26"/>
@@ -13493,25 +13573,31 @@
                       <m:sSub>
                         <m:sSubPr>
                           <m:ctrlPr>
-                            <a:rPr lang="en-US" sz="2400" i="1" smtClean="0">
+                            <a:rPr lang="en-US" sz="2400" smtClean="0">
                               <a:latin typeface="Cambria Math" panose="02040503050406030204" pitchFamily="18" charset="0"/>
                             </a:rPr>
                           </m:ctrlPr>
                         </m:sSubPr>
                         <m:e>
                           <m:r>
-                            <a:rPr lang="en-US" sz="2400" b="0" i="1" smtClean="0">
+                            <m:rPr>
+                              <m:sty m:val="p"/>
+                            </m:rPr>
+                            <a:rPr lang="en-US" sz="2400" b="0" i="0" smtClean="0">
                               <a:latin typeface="Cambria Math" panose="02040503050406030204" pitchFamily="18" charset="0"/>
                             </a:rPr>
-                            <m:t>𝑃𝑅𝑃</m:t>
+                            <m:t>PRP</m:t>
                           </m:r>
                         </m:e>
                         <m:sub>
                           <m:r>
-                            <a:rPr lang="en-US" sz="2400" i="1">
+                            <m:rPr>
+                              <m:sty m:val="p"/>
+                            </m:rPr>
+                            <a:rPr lang="en-US" sz="2400" i="0">
                               <a:latin typeface="Cambria Math" panose="02040503050406030204" pitchFamily="18" charset="0"/>
                             </a:rPr>
-                            <m:t>𝑎𝑑𝑣</m:t>
+                            <m:t>adv</m:t>
                           </m:r>
                         </m:sub>
                       </m:sSub>
@@ -13675,7 +13761,7 @@
             </p:txBody>
           </p:sp>
         </mc:Choice>
-        <mc:Fallback xmlns="">
+        <mc:Fallback>
           <p:sp>
             <p:nvSpPr>
               <p:cNvPr id="27" name="Прямоугольник 26"/>
@@ -15814,8 +15900,8 @@
           </p:sp>
         </mc:Fallback>
       </mc:AlternateContent>
-      <mc:AlternateContent xmlns:mc="http://schemas.openxmlformats.org/markup-compatibility/2006" xmlns:a14="http://schemas.microsoft.com/office/drawing/2010/main">
-        <mc:Choice Requires="a14">
+      <mc:AlternateContent xmlns:mc="http://schemas.openxmlformats.org/markup-compatibility/2006">
+        <mc:Choice xmlns:a14="http://schemas.microsoft.com/office/drawing/2010/main" Requires="a14">
           <p:sp>
             <p:nvSpPr>
               <p:cNvPr id="26" name="Прямоугольник 25"/>
@@ -15847,25 +15933,31 @@
                       <m:sSub>
                         <m:sSubPr>
                           <m:ctrlPr>
-                            <a:rPr lang="en-US" sz="2400" i="1" smtClean="0">
+                            <a:rPr lang="en-US" sz="2400" smtClean="0">
                               <a:latin typeface="Cambria Math" panose="02040503050406030204" pitchFamily="18" charset="0"/>
                             </a:rPr>
                           </m:ctrlPr>
                         </m:sSubPr>
                         <m:e>
                           <m:r>
-                            <a:rPr lang="en-US" sz="2400" b="0" i="1" smtClean="0">
+                            <m:rPr>
+                              <m:sty m:val="p"/>
+                            </m:rPr>
+                            <a:rPr lang="en-US" sz="2400" b="0" i="0" smtClean="0">
                               <a:latin typeface="Cambria Math" panose="02040503050406030204" pitchFamily="18" charset="0"/>
                             </a:rPr>
-                            <m:t>𝑃𝑟𝑒𝑑</m:t>
+                            <m:t>Pred</m:t>
                           </m:r>
                         </m:e>
                         <m:sub>
                           <m:r>
-                            <a:rPr lang="en-US" sz="2400" i="1">
+                            <m:rPr>
+                              <m:sty m:val="p"/>
+                            </m:rPr>
+                            <a:rPr lang="en-US" sz="2400" i="0">
                               <a:latin typeface="Cambria Math" panose="02040503050406030204" pitchFamily="18" charset="0"/>
                             </a:rPr>
-                            <m:t>𝑎𝑑𝑣</m:t>
+                            <m:t>adv</m:t>
                           </m:r>
                         </m:sub>
                       </m:sSub>
@@ -16016,7 +16108,7 @@
             </p:txBody>
           </p:sp>
         </mc:Choice>
-        <mc:Fallback xmlns="">
+        <mc:Fallback>
           <p:sp>
             <p:nvSpPr>
               <p:cNvPr id="26" name="Прямоугольник 25"/>
@@ -16107,8 +16199,8 @@
           </a:p>
         </p:txBody>
       </p:sp>
-      <mc:AlternateContent xmlns:mc="http://schemas.openxmlformats.org/markup-compatibility/2006" xmlns:a14="http://schemas.microsoft.com/office/drawing/2010/main">
-        <mc:Choice Requires="a14">
+      <mc:AlternateContent xmlns:mc="http://schemas.openxmlformats.org/markup-compatibility/2006">
+        <mc:Choice xmlns:a14="http://schemas.microsoft.com/office/drawing/2010/main" Requires="a14">
           <p:sp>
             <p:nvSpPr>
               <p:cNvPr id="3" name="Объект 2"/>
@@ -16150,25 +16242,31 @@
                     <m:sSub>
                       <m:sSubPr>
                         <m:ctrlPr>
-                          <a:rPr lang="en-US" sz="2800" i="1">
+                          <a:rPr lang="en-US" sz="2800">
                             <a:latin typeface="Cambria Math" panose="02040503050406030204" pitchFamily="18" charset="0"/>
                           </a:rPr>
                         </m:ctrlPr>
                       </m:sSubPr>
                       <m:e>
                         <m:r>
-                          <a:rPr lang="en-US" sz="2800" i="1">
-                            <a:latin typeface="Cambria Math" panose="02040503050406030204" pitchFamily="18" charset="0"/>
-                          </a:rPr>
-                          <m:t>𝑃𝑟𝑒𝑑</m:t>
+                          <m:rPr>
+                            <m:sty m:val="p"/>
+                          </m:rPr>
+                          <a:rPr lang="en-US" sz="2800" i="0">
+                            <a:latin typeface="Cambria Math" panose="02040503050406030204" pitchFamily="18" charset="0"/>
+                          </a:rPr>
+                          <m:t>Pred</m:t>
                         </m:r>
                       </m:e>
                       <m:sub>
                         <m:r>
-                          <a:rPr lang="en-US" sz="2800" i="1">
-                            <a:latin typeface="Cambria Math" panose="02040503050406030204" pitchFamily="18" charset="0"/>
-                          </a:rPr>
-                          <m:t>𝑎𝑑𝑣</m:t>
+                          <m:rPr>
+                            <m:sty m:val="p"/>
+                          </m:rPr>
+                          <a:rPr lang="en-US" sz="2800" i="0">
+                            <a:latin typeface="Cambria Math" panose="02040503050406030204" pitchFamily="18" charset="0"/>
+                          </a:rPr>
+                          <m:t>adv</m:t>
                         </m:r>
                       </m:sub>
                     </m:sSub>
@@ -16347,7 +16445,7 @@
             </p:txBody>
           </p:sp>
         </mc:Choice>
-        <mc:Fallback xmlns="">
+        <mc:Fallback>
           <p:sp>
             <p:nvSpPr>
               <p:cNvPr id="3" name="Объект 2"/>
@@ -16362,7 +16460,7 @@
               <a:blipFill>
                 <a:blip r:embed="rId2"/>
                 <a:stretch>
-                  <a:fillRect l="-1217" t="-2101" r="-1565"/>
+                  <a:fillRect l="-1217" t="-2101" r="-812"/>
                 </a:stretch>
               </a:blipFill>
             </p:spPr>
@@ -17805,8 +17903,8 @@
           </p:sp>
         </mc:Fallback>
       </mc:AlternateContent>
-      <mc:AlternateContent xmlns:mc="http://schemas.openxmlformats.org/markup-compatibility/2006" xmlns:a14="http://schemas.microsoft.com/office/drawing/2010/main">
-        <mc:Choice Requires="a14">
+      <mc:AlternateContent xmlns:mc="http://schemas.openxmlformats.org/markup-compatibility/2006">
+        <mc:Choice xmlns:a14="http://schemas.microsoft.com/office/drawing/2010/main" Requires="a14">
           <p:sp>
             <p:nvSpPr>
               <p:cNvPr id="25" name="Прямоугольник 24"/>
@@ -17838,25 +17936,31 @@
                       <m:sSub>
                         <m:sSubPr>
                           <m:ctrlPr>
-                            <a:rPr lang="en-US" sz="2400" i="1" smtClean="0">
+                            <a:rPr lang="en-US" sz="2400" smtClean="0">
                               <a:latin typeface="Cambria Math" panose="02040503050406030204" pitchFamily="18" charset="0"/>
                             </a:rPr>
                           </m:ctrlPr>
                         </m:sSubPr>
                         <m:e>
                           <m:r>
-                            <a:rPr lang="en-US" sz="2400" b="0" i="1" smtClean="0">
+                            <m:rPr>
+                              <m:sty m:val="p"/>
+                            </m:rPr>
+                            <a:rPr lang="en-US" sz="2400" b="0" i="0" smtClean="0">
                               <a:latin typeface="Cambria Math" panose="02040503050406030204" pitchFamily="18" charset="0"/>
                             </a:rPr>
-                            <m:t>𝑃𝑟𝑒𝑑</m:t>
+                            <m:t>Pred</m:t>
                           </m:r>
                         </m:e>
                         <m:sub>
                           <m:r>
-                            <a:rPr lang="en-US" sz="2400" i="1">
+                            <m:rPr>
+                              <m:sty m:val="p"/>
+                            </m:rPr>
+                            <a:rPr lang="en-US" sz="2400" i="0">
                               <a:latin typeface="Cambria Math" panose="02040503050406030204" pitchFamily="18" charset="0"/>
                             </a:rPr>
-                            <m:t>𝑎𝑑𝑣</m:t>
+                            <m:t>adv</m:t>
                           </m:r>
                         </m:sub>
                       </m:sSub>
@@ -18007,7 +18111,7 @@
             </p:txBody>
           </p:sp>
         </mc:Choice>
-        <mc:Fallback xmlns="">
+        <mc:Fallback>
           <p:sp>
             <p:nvSpPr>
               <p:cNvPr id="25" name="Прямоугольник 24"/>
@@ -18136,8 +18240,8 @@
           </a:p>
         </p:txBody>
       </p:sp>
-      <mc:AlternateContent xmlns:mc="http://schemas.openxmlformats.org/markup-compatibility/2006" xmlns:a14="http://schemas.microsoft.com/office/drawing/2010/main">
-        <mc:Choice Requires="a14">
+      <mc:AlternateContent xmlns:mc="http://schemas.openxmlformats.org/markup-compatibility/2006">
+        <mc:Choice xmlns:a14="http://schemas.microsoft.com/office/drawing/2010/main" Requires="a14">
           <p:sp>
             <p:nvSpPr>
               <p:cNvPr id="3" name="Объект 2"/>
@@ -18385,12 +18489,37 @@
                       </a:rPr>
                       <m:t>:</m:t>
                     </m:r>
-                    <m:r>
-                      <a:rPr lang="en-US" b="0" i="1" smtClean="0">
-                        <a:latin typeface="Cambria Math" panose="02040503050406030204" pitchFamily="18" charset="0"/>
-                      </a:rPr>
-                      <m:t>𝑃𝑟𝑒𝑑</m:t>
-                    </m:r>
+                    <m:sSub>
+                      <m:sSubPr>
+                        <m:ctrlPr>
+                          <a:rPr lang="en-US" b="0" smtClean="0">
+                            <a:latin typeface="Cambria Math" panose="02040503050406030204" pitchFamily="18" charset="0"/>
+                          </a:rPr>
+                        </m:ctrlPr>
+                      </m:sSubPr>
+                      <m:e>
+                        <m:r>
+                          <m:rPr>
+                            <m:sty m:val="p"/>
+                          </m:rPr>
+                          <a:rPr lang="en-US" b="0" i="0" smtClean="0">
+                            <a:latin typeface="Cambria Math" panose="02040503050406030204" pitchFamily="18" charset="0"/>
+                          </a:rPr>
+                          <m:t>Pred</m:t>
+                        </m:r>
+                      </m:e>
+                      <m:sub>
+                        <m:r>
+                          <m:rPr>
+                            <m:sty m:val="p"/>
+                          </m:rPr>
+                          <a:rPr lang="en-US" b="0" i="0" smtClean="0">
+                            <a:latin typeface="Cambria Math" panose="02040503050406030204" pitchFamily="18" charset="0"/>
+                          </a:rPr>
+                          <m:t>adv</m:t>
+                        </m:r>
+                      </m:sub>
+                    </m:sSub>
                     <m:d>
                       <m:dPr>
                         <m:begChr m:val="["/>
@@ -18479,7 +18608,7 @@
             </p:txBody>
           </p:sp>
         </mc:Choice>
-        <mc:Fallback xmlns="">
+        <mc:Fallback>
           <p:sp>
             <p:nvSpPr>
               <p:cNvPr id="3" name="Объект 2"/>
@@ -20293,10 +20422,10 @@
         </p:nvGrpSpPr>
         <p:grpSpPr bwMode="auto">
           <a:xfrm>
-            <a:off x="4368923" y="5487922"/>
-            <a:ext cx="2250241" cy="439342"/>
-            <a:chOff x="1776" y="2041"/>
-            <a:chExt cx="2798" cy="369"/>
+            <a:off x="4368923" y="5496259"/>
+            <a:ext cx="1937395" cy="431008"/>
+            <a:chOff x="1776" y="2048"/>
+            <a:chExt cx="2409" cy="362"/>
           </a:xfrm>
         </p:grpSpPr>
         <p:sp>
@@ -20334,8 +20463,8 @@
             </a:p>
           </p:txBody>
         </p:sp>
-        <mc:AlternateContent xmlns:mc="http://schemas.openxmlformats.org/markup-compatibility/2006" xmlns:a14="http://schemas.microsoft.com/office/drawing/2010/main">
-          <mc:Choice Requires="a14">
+        <mc:AlternateContent xmlns:mc="http://schemas.openxmlformats.org/markup-compatibility/2006">
+          <mc:Choice xmlns:a14="http://schemas.microsoft.com/office/drawing/2010/main" Requires="a14">
             <p:sp>
               <p:nvSpPr>
                 <p:cNvPr id="73" name="Text Box 14"/>
@@ -20346,7 +20475,7 @@
               </p:nvSpPr>
               <p:spPr bwMode="auto">
                 <a:xfrm>
-                  <a:off x="2190" y="2041"/>
+                  <a:off x="1801" y="2048"/>
                   <a:ext cx="2384" cy="362"/>
                 </a:xfrm>
                 <a:prstGeom prst="rect">
@@ -20459,7 +20588,7 @@
               </p:txBody>
             </p:sp>
           </mc:Choice>
-          <mc:Fallback xmlns="">
+          <mc:Fallback>
             <p:sp>
               <p:nvSpPr>
                 <p:cNvPr id="73" name="Text Box 14"/>
@@ -20470,7 +20599,7 @@
               </p:nvSpPr>
               <p:spPr bwMode="auto">
                 <a:xfrm>
-                  <a:off x="2190" y="2041"/>
+                  <a:off x="1801" y="2048"/>
                   <a:ext cx="2384" cy="362"/>
                 </a:xfrm>
                 <a:prstGeom prst="rect">
@@ -20479,7 +20608,7 @@
                 <a:blipFill>
                   <a:blip r:embed="rId14"/>
                   <a:stretch>
-                    <a:fillRect t="-5634" r="-5079" b="-18310"/>
+                    <a:fillRect t="-7143" r="-4762" b="-20000"/>
                   </a:stretch>
                 </a:blipFill>
                 <a:ln w="9525">
@@ -21830,8 +21959,8 @@
           </a:p>
         </p:txBody>
       </p:sp>
-      <mc:AlternateContent xmlns:mc="http://schemas.openxmlformats.org/markup-compatibility/2006" xmlns:a14="http://schemas.microsoft.com/office/drawing/2010/main">
-        <mc:Choice Requires="a14">
+      <mc:AlternateContent xmlns:mc="http://schemas.openxmlformats.org/markup-compatibility/2006">
+        <mc:Choice xmlns:a14="http://schemas.microsoft.com/office/drawing/2010/main" Requires="a14">
           <p:sp>
             <p:nvSpPr>
               <p:cNvPr id="3" name="Объект 2"/>
@@ -22021,33 +22150,42 @@
                       <m:t>=</m:t>
                     </m:r>
                     <m:r>
-                      <a:rPr lang="en-US" b="0" i="1" dirty="0" smtClean="0">
-                        <a:latin typeface="Cambria Math" panose="02040503050406030204" pitchFamily="18" charset="0"/>
-                      </a:rPr>
-                      <m:t>𝑃𝑟𝑒</m:t>
+                      <m:rPr>
+                        <m:sty m:val="p"/>
+                      </m:rPr>
+                      <a:rPr lang="en-US" b="0" i="0" dirty="0" smtClean="0">
+                        <a:latin typeface="Cambria Math" panose="02040503050406030204" pitchFamily="18" charset="0"/>
+                      </a:rPr>
+                      <m:t>Pre</m:t>
                     </m:r>
                     <m:sSub>
                       <m:sSubPr>
                         <m:ctrlPr>
-                          <a:rPr lang="en-US" b="0" i="1" dirty="0" smtClean="0">
+                          <a:rPr lang="en-US" b="0" dirty="0" smtClean="0">
                             <a:latin typeface="Cambria Math" panose="02040503050406030204" pitchFamily="18" charset="0"/>
                           </a:rPr>
                         </m:ctrlPr>
                       </m:sSubPr>
                       <m:e>
                         <m:r>
-                          <a:rPr lang="en-US" b="0" i="1" dirty="0" smtClean="0">
-                            <a:latin typeface="Cambria Math" panose="02040503050406030204" pitchFamily="18" charset="0"/>
-                          </a:rPr>
-                          <m:t>𝑑</m:t>
+                          <m:rPr>
+                            <m:sty m:val="p"/>
+                          </m:rPr>
+                          <a:rPr lang="en-US" b="0" i="0" dirty="0" smtClean="0">
+                            <a:latin typeface="Cambria Math" panose="02040503050406030204" pitchFamily="18" charset="0"/>
+                          </a:rPr>
+                          <m:t>d</m:t>
                         </m:r>
                       </m:e>
                       <m:sub>
                         <m:r>
-                          <a:rPr lang="en-US" b="0" i="1" dirty="0" smtClean="0">
-                            <a:latin typeface="Cambria Math" panose="02040503050406030204" pitchFamily="18" charset="0"/>
-                          </a:rPr>
-                          <m:t>𝑎𝑑𝑣</m:t>
+                          <m:rPr>
+                            <m:sty m:val="p"/>
+                          </m:rPr>
+                          <a:rPr lang="en-US" b="0" i="0" dirty="0" smtClean="0">
+                            <a:latin typeface="Cambria Math" panose="02040503050406030204" pitchFamily="18" charset="0"/>
+                          </a:rPr>
+                          <m:t>adv</m:t>
                         </m:r>
                       </m:sub>
                     </m:sSub>
@@ -22056,20 +22194,23 @@
                         <m:begChr m:val="["/>
                         <m:endChr m:val="]"/>
                         <m:ctrlPr>
-                          <a:rPr lang="en-US" b="0" i="1" dirty="0" smtClean="0">
+                          <a:rPr lang="en-US" b="0" dirty="0" smtClean="0">
                             <a:latin typeface="Cambria Math" panose="02040503050406030204" pitchFamily="18" charset="0"/>
                           </a:rPr>
                         </m:ctrlPr>
                       </m:dPr>
                       <m:e>
                         <m:r>
-                          <a:rPr lang="en-US" b="0" i="1" dirty="0" smtClean="0">
-                            <a:latin typeface="Cambria Math" panose="02040503050406030204" pitchFamily="18" charset="0"/>
-                          </a:rPr>
-                          <m:t>𝐴</m:t>
+                          <m:rPr>
+                            <m:sty m:val="p"/>
+                          </m:rPr>
+                          <a:rPr lang="en-US" b="0" i="0" dirty="0" smtClean="0">
+                            <a:latin typeface="Cambria Math" panose="02040503050406030204" pitchFamily="18" charset="0"/>
+                          </a:rPr>
+                          <m:t>A</m:t>
                         </m:r>
                         <m:r>
-                          <a:rPr lang="en-US" b="0" i="1" dirty="0" smtClean="0">
+                          <a:rPr lang="en-US" b="0" i="0" dirty="0" smtClean="0">
                             <a:latin typeface="Cambria Math" panose="02040503050406030204" pitchFamily="18" charset="0"/>
                           </a:rPr>
                           <m:t>,</m:t>
@@ -22358,7 +22499,7 @@
             </p:txBody>
           </p:sp>
         </mc:Choice>
-        <mc:Fallback xmlns="">
+        <mc:Fallback>
           <p:sp>
             <p:nvSpPr>
               <p:cNvPr id="3" name="Объект 2"/>
@@ -24172,10 +24313,10 @@
         </p:nvGrpSpPr>
         <p:grpSpPr bwMode="auto">
           <a:xfrm>
-            <a:off x="4368923" y="5487922"/>
-            <a:ext cx="2250241" cy="439342"/>
-            <a:chOff x="1776" y="2041"/>
-            <a:chExt cx="2798" cy="369"/>
+            <a:off x="4329516" y="5506974"/>
+            <a:ext cx="1930961" cy="431008"/>
+            <a:chOff x="1727" y="2057"/>
+            <a:chExt cx="2401" cy="362"/>
           </a:xfrm>
         </p:grpSpPr>
         <p:sp>
@@ -24213,8 +24354,8 @@
             </a:p>
           </p:txBody>
         </p:sp>
-        <mc:AlternateContent xmlns:mc="http://schemas.openxmlformats.org/markup-compatibility/2006" xmlns:a14="http://schemas.microsoft.com/office/drawing/2010/main">
-          <mc:Choice Requires="a14">
+        <mc:AlternateContent xmlns:mc="http://schemas.openxmlformats.org/markup-compatibility/2006">
+          <mc:Choice xmlns:a14="http://schemas.microsoft.com/office/drawing/2010/main" Requires="a14">
             <p:sp>
               <p:nvSpPr>
                 <p:cNvPr id="73" name="Text Box 14"/>
@@ -24225,7 +24366,7 @@
               </p:nvSpPr>
               <p:spPr bwMode="auto">
                 <a:xfrm>
-                  <a:off x="2190" y="2041"/>
+                  <a:off x="1727" y="2057"/>
                   <a:ext cx="2384" cy="362"/>
                 </a:xfrm>
                 <a:prstGeom prst="rect">
@@ -24338,7 +24479,7 @@
               </p:txBody>
             </p:sp>
           </mc:Choice>
-          <mc:Fallback xmlns="">
+          <mc:Fallback>
             <p:sp>
               <p:nvSpPr>
                 <p:cNvPr id="73" name="Text Box 14"/>
@@ -24349,7 +24490,7 @@
               </p:nvSpPr>
               <p:spPr bwMode="auto">
                 <a:xfrm>
-                  <a:off x="2190" y="2041"/>
+                  <a:off x="1727" y="2057"/>
                   <a:ext cx="2384" cy="362"/>
                 </a:xfrm>
                 <a:prstGeom prst="rect">
@@ -24895,8 +25036,8 @@
           </a:p>
         </p:txBody>
       </p:sp>
-      <mc:AlternateContent xmlns:mc="http://schemas.openxmlformats.org/markup-compatibility/2006" xmlns:a14="http://schemas.microsoft.com/office/drawing/2010/main">
-        <mc:Choice Requires="a14">
+      <mc:AlternateContent xmlns:mc="http://schemas.openxmlformats.org/markup-compatibility/2006">
+        <mc:Choice xmlns:a14="http://schemas.microsoft.com/office/drawing/2010/main" Requires="a14">
           <p:sp>
             <p:nvSpPr>
               <p:cNvPr id="3" name="Объект 2"/>
@@ -25094,33 +25235,42 @@
                 <a14:m>
                   <m:oMath xmlns:m="http://schemas.openxmlformats.org/officeDocument/2006/math">
                     <m:r>
-                      <a:rPr lang="en-US" b="0" i="1" smtClean="0">
-                        <a:latin typeface="Cambria Math" panose="02040503050406030204" pitchFamily="18" charset="0"/>
-                      </a:rPr>
-                      <m:t>𝑃𝑅</m:t>
+                      <m:rPr>
+                        <m:sty m:val="p"/>
+                      </m:rPr>
+                      <a:rPr lang="en-US" b="0" i="0" smtClean="0">
+                        <a:latin typeface="Cambria Math" panose="02040503050406030204" pitchFamily="18" charset="0"/>
+                      </a:rPr>
+                      <m:t>PR</m:t>
                     </m:r>
                     <m:sSub>
                       <m:sSubPr>
                         <m:ctrlPr>
-                          <a:rPr lang="en-US" b="0" i="1" smtClean="0">
+                          <a:rPr lang="en-US" b="0" smtClean="0">
                             <a:latin typeface="Cambria Math" panose="02040503050406030204" pitchFamily="18" charset="0"/>
                           </a:rPr>
                         </m:ctrlPr>
                       </m:sSubPr>
                       <m:e>
                         <m:r>
-                          <a:rPr lang="en-US" b="0" i="1" smtClean="0">
-                            <a:latin typeface="Cambria Math" panose="02040503050406030204" pitchFamily="18" charset="0"/>
-                          </a:rPr>
-                          <m:t>𝑃</m:t>
+                          <m:rPr>
+                            <m:sty m:val="p"/>
+                          </m:rPr>
+                          <a:rPr lang="en-US" b="0" i="0" smtClean="0">
+                            <a:latin typeface="Cambria Math" panose="02040503050406030204" pitchFamily="18" charset="0"/>
+                          </a:rPr>
+                          <m:t>P</m:t>
                         </m:r>
                       </m:e>
                       <m:sub>
                         <m:r>
-                          <a:rPr lang="en-US" b="0" i="1" smtClean="0">
-                            <a:latin typeface="Cambria Math" panose="02040503050406030204" pitchFamily="18" charset="0"/>
-                          </a:rPr>
-                          <m:t>𝑎𝑑𝑣</m:t>
+                          <m:rPr>
+                            <m:sty m:val="p"/>
+                          </m:rPr>
+                          <a:rPr lang="en-US" b="0" i="0" smtClean="0">
+                            <a:latin typeface="Cambria Math" panose="02040503050406030204" pitchFamily="18" charset="0"/>
+                          </a:rPr>
+                          <m:t>adv</m:t>
                         </m:r>
                       </m:sub>
                     </m:sSub>
@@ -25304,7 +25454,15 @@
                 </a14:m>
                 <a:r>
                   <a:rPr lang="en-US" dirty="0"/>
-                  <a:t> - </a:t>
+                  <a:t> </a:t>
+                </a:r>
+                <a:r>
+                  <a:rPr lang="ru-RU" dirty="0"/>
+                  <a:t>–</a:t>
+                </a:r>
+                <a:r>
+                  <a:rPr lang="en-US" dirty="0"/>
+                  <a:t> </a:t>
                 </a:r>
                 <a:r>
                   <a:rPr lang="ru-RU" dirty="0"/>
@@ -25400,7 +25558,7 @@
             </p:txBody>
           </p:sp>
         </mc:Choice>
-        <mc:Fallback xmlns="">
+        <mc:Fallback>
           <p:sp>
             <p:nvSpPr>
               <p:cNvPr id="3" name="Объект 2"/>
@@ -25412,7 +25570,7 @@
               </p:nvPr>
             </p:nvSpPr>
             <p:spPr>
-              <a:blipFill rotWithShape="0">
+              <a:blipFill>
                 <a:blip r:embed="rId2"/>
                 <a:stretch>
                   <a:fillRect l="-1043" t="-2101"/>
@@ -25509,8 +25667,8 @@
           </a:p>
         </p:txBody>
       </p:sp>
-      <mc:AlternateContent xmlns:mc="http://schemas.openxmlformats.org/markup-compatibility/2006" xmlns:a14="http://schemas.microsoft.com/office/drawing/2010/main">
-        <mc:Choice Requires="a14">
+      <mc:AlternateContent xmlns:mc="http://schemas.openxmlformats.org/markup-compatibility/2006">
+        <mc:Choice xmlns:a14="http://schemas.microsoft.com/office/drawing/2010/main" Requires="a14">
           <p:sp>
             <p:nvSpPr>
               <p:cNvPr id="3" name="Объект 2"/>
@@ -25604,7 +25762,7 @@
                 </a:r>
                 <a:r>
                   <a:rPr lang="ru-RU" dirty="0" err="1"/>
-                  <a:t>пределённый</a:t>
+                  <a:t>пределённный</a:t>
                 </a:r>
                 <a:r>
                   <a:rPr lang="ru-RU" dirty="0"/>
@@ -26305,7 +26463,7 @@
             </p:txBody>
           </p:sp>
         </mc:Choice>
-        <mc:Fallback xmlns="">
+        <mc:Fallback>
           <p:sp>
             <p:nvSpPr>
               <p:cNvPr id="3" name="Объект 2"/>
@@ -26324,7 +26482,7 @@
               <a:blipFill>
                 <a:blip r:embed="rId2"/>
                 <a:stretch>
-                  <a:fillRect l="-1043" t="-2158"/>
+                  <a:fillRect l="-1043" t="-2158" r="-348"/>
                 </a:stretch>
               </a:blipFill>
             </p:spPr>
@@ -28246,8 +28404,8 @@
           </p:sp>
         </mc:Fallback>
       </mc:AlternateContent>
-      <mc:AlternateContent xmlns:mc="http://schemas.openxmlformats.org/markup-compatibility/2006" xmlns:a14="http://schemas.microsoft.com/office/drawing/2010/main">
-        <mc:Choice Requires="a14">
+      <mc:AlternateContent xmlns:mc="http://schemas.openxmlformats.org/markup-compatibility/2006">
+        <mc:Choice xmlns:a14="http://schemas.microsoft.com/office/drawing/2010/main" Requires="a14">
           <p:sp>
             <p:nvSpPr>
               <p:cNvPr id="25" name="Прямоугольник 24"/>
@@ -28279,25 +28437,31 @@
                       <m:sSub>
                         <m:sSubPr>
                           <m:ctrlPr>
-                            <a:rPr lang="en-US" sz="2400" i="1" smtClean="0">
+                            <a:rPr lang="en-US" sz="2400" smtClean="0">
                               <a:latin typeface="Cambria Math" panose="02040503050406030204" pitchFamily="18" charset="0"/>
                             </a:rPr>
                           </m:ctrlPr>
                         </m:sSubPr>
                         <m:e>
                           <m:r>
-                            <a:rPr lang="en-US" sz="2400" b="0" i="1" smtClean="0">
+                            <m:rPr>
+                              <m:sty m:val="p"/>
+                            </m:rPr>
+                            <a:rPr lang="en-US" sz="2400" b="0" i="0" smtClean="0">
                               <a:latin typeface="Cambria Math" panose="02040503050406030204" pitchFamily="18" charset="0"/>
                             </a:rPr>
-                            <m:t>𝑅𝑒𝑐</m:t>
+                            <m:t>Rec</m:t>
                           </m:r>
                         </m:e>
                         <m:sub>
                           <m:r>
-                            <a:rPr lang="en-US" sz="2400" i="1">
+                            <m:rPr>
+                              <m:sty m:val="p"/>
+                            </m:rPr>
+                            <a:rPr lang="en-US" sz="2400" i="0">
                               <a:latin typeface="Cambria Math" panose="02040503050406030204" pitchFamily="18" charset="0"/>
                             </a:rPr>
-                            <m:t>𝑎𝑑𝑣</m:t>
+                            <m:t>adv</m:t>
                           </m:r>
                         </m:sub>
                       </m:sSub>
@@ -28388,7 +28552,7 @@
             </p:txBody>
           </p:sp>
         </mc:Choice>
-        <mc:Fallback xmlns="">
+        <mc:Fallback>
           <p:sp>
             <p:nvSpPr>
               <p:cNvPr id="25" name="Прямоугольник 24"/>
@@ -28479,8 +28643,8 @@
           </a:p>
         </p:txBody>
       </p:sp>
-      <mc:AlternateContent xmlns:mc="http://schemas.openxmlformats.org/markup-compatibility/2006" xmlns:a14="http://schemas.microsoft.com/office/drawing/2010/main">
-        <mc:Choice Requires="a14">
+      <mc:AlternateContent xmlns:mc="http://schemas.openxmlformats.org/markup-compatibility/2006">
+        <mc:Choice xmlns:a14="http://schemas.microsoft.com/office/drawing/2010/main" Requires="a14">
           <p:sp>
             <p:nvSpPr>
               <p:cNvPr id="3" name="Объект 2"/>
@@ -28522,25 +28686,31 @@
                     <m:sSub>
                       <m:sSubPr>
                         <m:ctrlPr>
-                          <a:rPr lang="en-US" sz="2800" i="1">
+                          <a:rPr lang="en-US" sz="2800">
                             <a:latin typeface="Cambria Math" panose="02040503050406030204" pitchFamily="18" charset="0"/>
                           </a:rPr>
                         </m:ctrlPr>
                       </m:sSubPr>
                       <m:e>
                         <m:r>
-                          <a:rPr lang="en-US" sz="2800" b="0" i="1" smtClean="0">
-                            <a:latin typeface="Cambria Math" panose="02040503050406030204" pitchFamily="18" charset="0"/>
-                          </a:rPr>
-                          <m:t>𝑅𝑒𝑐</m:t>
+                          <m:rPr>
+                            <m:sty m:val="p"/>
+                          </m:rPr>
+                          <a:rPr lang="en-US" sz="2800" b="0" i="0" smtClean="0">
+                            <a:latin typeface="Cambria Math" panose="02040503050406030204" pitchFamily="18" charset="0"/>
+                          </a:rPr>
+                          <m:t>Rec</m:t>
                         </m:r>
                       </m:e>
                       <m:sub>
                         <m:r>
-                          <a:rPr lang="en-US" sz="2800" i="1">
-                            <a:latin typeface="Cambria Math" panose="02040503050406030204" pitchFamily="18" charset="0"/>
-                          </a:rPr>
-                          <m:t>𝑎𝑑𝑣</m:t>
+                          <m:rPr>
+                            <m:sty m:val="p"/>
+                          </m:rPr>
+                          <a:rPr lang="en-US" sz="2800" i="0">
+                            <a:latin typeface="Cambria Math" panose="02040503050406030204" pitchFamily="18" charset="0"/>
+                          </a:rPr>
+                          <m:t>adv</m:t>
                         </m:r>
                       </m:sub>
                     </m:sSub>
@@ -28662,7 +28832,7 @@
             </p:txBody>
           </p:sp>
         </mc:Choice>
-        <mc:Fallback xmlns="">
+        <mc:Fallback>
           <p:sp>
             <p:nvSpPr>
               <p:cNvPr id="3" name="Объект 2"/>
@@ -30077,8 +30247,8 @@
           </p:sp>
         </mc:Fallback>
       </mc:AlternateContent>
-      <mc:AlternateContent xmlns:mc="http://schemas.openxmlformats.org/markup-compatibility/2006" xmlns:a14="http://schemas.microsoft.com/office/drawing/2010/main">
-        <mc:Choice Requires="a14">
+      <mc:AlternateContent xmlns:mc="http://schemas.openxmlformats.org/markup-compatibility/2006">
+        <mc:Choice xmlns:a14="http://schemas.microsoft.com/office/drawing/2010/main" Requires="a14">
           <p:sp>
             <p:nvSpPr>
               <p:cNvPr id="25" name="Прямоугольник 24"/>
@@ -30110,25 +30280,31 @@
                       <m:sSub>
                         <m:sSubPr>
                           <m:ctrlPr>
-                            <a:rPr lang="en-US" sz="2400" i="1" smtClean="0">
+                            <a:rPr lang="en-US" sz="2400" smtClean="0">
                               <a:latin typeface="Cambria Math" panose="02040503050406030204" pitchFamily="18" charset="0"/>
                             </a:rPr>
                           </m:ctrlPr>
                         </m:sSubPr>
                         <m:e>
                           <m:r>
-                            <a:rPr lang="en-US" sz="2400" b="0" i="1" smtClean="0">
+                            <m:rPr>
+                              <m:sty m:val="p"/>
+                            </m:rPr>
+                            <a:rPr lang="en-US" sz="2400" b="0" i="0" smtClean="0">
                               <a:latin typeface="Cambria Math" panose="02040503050406030204" pitchFamily="18" charset="0"/>
                             </a:rPr>
-                            <m:t>𝑅𝑒𝑐</m:t>
+                            <m:t>Rec</m:t>
                           </m:r>
                         </m:e>
                         <m:sub>
                           <m:r>
-                            <a:rPr lang="en-US" sz="2400" i="1">
+                            <m:rPr>
+                              <m:sty m:val="p"/>
+                            </m:rPr>
+                            <a:rPr lang="en-US" sz="2400" i="0">
                               <a:latin typeface="Cambria Math" panose="02040503050406030204" pitchFamily="18" charset="0"/>
                             </a:rPr>
-                            <m:t>𝑎𝑑𝑣</m:t>
+                            <m:t>adv</m:t>
                           </m:r>
                         </m:sub>
                       </m:sSub>
@@ -30219,7 +30395,7 @@
             </p:txBody>
           </p:sp>
         </mc:Choice>
-        <mc:Fallback xmlns="">
+        <mc:Fallback>
           <p:sp>
             <p:nvSpPr>
               <p:cNvPr id="25" name="Прямоугольник 24"/>
@@ -30682,8 +30858,8 @@
           </a:p>
         </p:txBody>
       </p:sp>
-      <mc:AlternateContent xmlns:mc="http://schemas.openxmlformats.org/markup-compatibility/2006" xmlns:a14="http://schemas.microsoft.com/office/drawing/2010/main">
-        <mc:Choice Requires="a14">
+      <mc:AlternateContent xmlns:mc="http://schemas.openxmlformats.org/markup-compatibility/2006">
+        <mc:Choice xmlns:a14="http://schemas.microsoft.com/office/drawing/2010/main" Requires="a14">
           <p:sp>
             <p:nvSpPr>
               <p:cNvPr id="3" name="Объект 2"/>
@@ -30799,33 +30975,42 @@
                 <a14:m>
                   <m:oMath xmlns:m="http://schemas.openxmlformats.org/officeDocument/2006/math">
                     <m:r>
-                      <a:rPr lang="en-US" b="0" i="1" smtClean="0">
-                        <a:latin typeface="Cambria Math" panose="02040503050406030204" pitchFamily="18" charset="0"/>
-                      </a:rPr>
-                      <m:t>𝑅𝑒</m:t>
+                      <m:rPr>
+                        <m:sty m:val="p"/>
+                      </m:rPr>
+                      <a:rPr lang="en-US" b="0" i="0" smtClean="0">
+                        <a:latin typeface="Cambria Math" panose="02040503050406030204" pitchFamily="18" charset="0"/>
+                      </a:rPr>
+                      <m:t>Re</m:t>
                     </m:r>
                     <m:sSub>
                       <m:sSubPr>
                         <m:ctrlPr>
-                          <a:rPr lang="en-US" b="0" i="1" smtClean="0">
+                          <a:rPr lang="en-US" b="0" smtClean="0">
                             <a:latin typeface="Cambria Math" panose="02040503050406030204" pitchFamily="18" charset="0"/>
                           </a:rPr>
                         </m:ctrlPr>
                       </m:sSubPr>
                       <m:e>
                         <m:r>
-                          <a:rPr lang="en-US" b="0" i="1" smtClean="0">
-                            <a:latin typeface="Cambria Math" panose="02040503050406030204" pitchFamily="18" charset="0"/>
-                          </a:rPr>
-                          <m:t>𝑐</m:t>
+                          <m:rPr>
+                            <m:sty m:val="p"/>
+                          </m:rPr>
+                          <a:rPr lang="en-US" b="0" i="0" smtClean="0">
+                            <a:latin typeface="Cambria Math" panose="02040503050406030204" pitchFamily="18" charset="0"/>
+                          </a:rPr>
+                          <m:t>c</m:t>
                         </m:r>
                       </m:e>
                       <m:sub>
                         <m:r>
-                          <a:rPr lang="en-US" b="0" i="1" smtClean="0">
-                            <a:latin typeface="Cambria Math" panose="02040503050406030204" pitchFamily="18" charset="0"/>
-                          </a:rPr>
-                          <m:t>𝑎𝑑𝑣</m:t>
+                          <m:rPr>
+                            <m:sty m:val="p"/>
+                          </m:rPr>
+                          <a:rPr lang="en-US" b="0" i="0" smtClean="0">
+                            <a:latin typeface="Cambria Math" panose="02040503050406030204" pitchFamily="18" charset="0"/>
+                          </a:rPr>
+                          <m:t>adv</m:t>
                         </m:r>
                       </m:sub>
                     </m:sSub>
@@ -30977,7 +31162,15 @@
                 </a:r>
                 <a:r>
                   <a:rPr lang="ru-RU" dirty="0"/>
-                  <a:t>полный перебор ключа, исчерпывающий поиск ключа, полная апробация). Если противник проверяет </a:t>
+                  <a:t>полный перебор ключа, исчерпывающий поиск ключа, полное </a:t>
+                </a:r>
+                <a:r>
+                  <a:rPr lang="ru-RU" dirty="0" err="1"/>
+                  <a:t>апробование</a:t>
+                </a:r>
+                <a:r>
+                  <a:rPr lang="ru-RU" dirty="0"/>
+                  <a:t>). Если противник проверяет </a:t>
                 </a:r>
                 <a14:m>
                   <m:oMath xmlns:m="http://schemas.openxmlformats.org/officeDocument/2006/math">
@@ -31003,7 +31196,7 @@
                 </a:r>
                 <a:r>
                   <a:rPr lang="ru-RU" dirty="0"/>
-                  <a:t> ограниченное от</a:t>
+                  <a:t>-ограниченное от</a:t>
                 </a:r>
                 <a14:m>
                   <m:oMath xmlns:m="http://schemas.openxmlformats.org/officeDocument/2006/math">
@@ -31098,7 +31291,7 @@
             </p:txBody>
           </p:sp>
         </mc:Choice>
-        <mc:Fallback xmlns="">
+        <mc:Fallback>
           <p:sp>
             <p:nvSpPr>
               <p:cNvPr id="3" name="Объект 2"/>
@@ -32862,8 +33055,8 @@
           </a:p>
         </p:txBody>
       </p:sp>
-      <mc:AlternateContent xmlns:mc="http://schemas.openxmlformats.org/markup-compatibility/2006" xmlns:a14="http://schemas.microsoft.com/office/drawing/2010/main">
-        <mc:Choice Requires="a14">
+      <mc:AlternateContent xmlns:mc="http://schemas.openxmlformats.org/markup-compatibility/2006">
+        <mc:Choice xmlns:a14="http://schemas.microsoft.com/office/drawing/2010/main" Requires="a14">
           <p:sp>
             <p:nvSpPr>
               <p:cNvPr id="3" name="Объект 2"/>
@@ -33448,33 +33641,42 @@
                     </m:oMathParaPr>
                     <m:oMath xmlns:m="http://schemas.openxmlformats.org/officeDocument/2006/math">
                       <m:r>
-                        <a:rPr lang="en-US" b="0" i="1" smtClean="0">
+                        <m:rPr>
+                          <m:sty m:val="p"/>
+                        </m:rPr>
+                        <a:rPr lang="en-US" b="0" i="0" smtClean="0">
                           <a:latin typeface="Cambria Math" panose="02040503050406030204" pitchFamily="18" charset="0"/>
                         </a:rPr>
-                        <m:t>𝑆</m:t>
+                        <m:t>S</m:t>
                       </m:r>
                       <m:sSub>
                         <m:sSubPr>
                           <m:ctrlPr>
-                            <a:rPr lang="en-US" b="0" i="1" smtClean="0">
+                            <a:rPr lang="en-US" b="0" smtClean="0">
                               <a:latin typeface="Cambria Math" panose="02040503050406030204" pitchFamily="18" charset="0"/>
                             </a:rPr>
                           </m:ctrlPr>
                         </m:sSubPr>
                         <m:e>
                           <m:r>
-                            <a:rPr lang="en-US" b="0" i="1" smtClean="0">
+                            <m:rPr>
+                              <m:sty m:val="p"/>
+                            </m:rPr>
+                            <a:rPr lang="en-US" b="0" i="0" smtClean="0">
                               <a:latin typeface="Cambria Math" panose="02040503050406030204" pitchFamily="18" charset="0"/>
                             </a:rPr>
-                            <m:t>𝑆</m:t>
+                            <m:t>S</m:t>
                           </m:r>
                         </m:e>
                         <m:sub>
                           <m:r>
-                            <a:rPr lang="en-US" b="0" i="1" smtClean="0">
+                            <m:rPr>
+                              <m:sty m:val="p"/>
+                            </m:rPr>
+                            <a:rPr lang="en-US" b="0" i="0" smtClean="0">
                               <a:latin typeface="Cambria Math" panose="02040503050406030204" pitchFamily="18" charset="0"/>
                             </a:rPr>
-                            <m:t>𝑎𝑑𝑣</m:t>
+                            <m:t>adv</m:t>
                           </m:r>
                         </m:sub>
                       </m:sSub>
@@ -33538,33 +33740,42 @@
                         <m:t>=2∗</m:t>
                       </m:r>
                       <m:r>
-                        <a:rPr lang="en-US" b="0" i="1" smtClean="0">
+                        <m:rPr>
+                          <m:sty m:val="p"/>
+                        </m:rPr>
+                        <a:rPr lang="en-US" b="0" i="0" smtClean="0">
                           <a:latin typeface="Cambria Math" panose="02040503050406030204" pitchFamily="18" charset="0"/>
                         </a:rPr>
-                        <m:t>𝐵</m:t>
+                        <m:t>B</m:t>
                       </m:r>
                       <m:sSub>
                         <m:sSubPr>
                           <m:ctrlPr>
-                            <a:rPr lang="en-US" b="0" i="1" smtClean="0">
+                            <a:rPr lang="en-US" b="0" smtClean="0">
                               <a:latin typeface="Cambria Math" panose="02040503050406030204" pitchFamily="18" charset="0"/>
                             </a:rPr>
                           </m:ctrlPr>
                         </m:sSubPr>
                         <m:e>
                           <m:r>
-                            <a:rPr lang="en-US" b="0" i="1" smtClean="0">
+                            <m:rPr>
+                              <m:sty m:val="p"/>
+                            </m:rPr>
+                            <a:rPr lang="en-US" b="0" i="0" smtClean="0">
                               <a:latin typeface="Cambria Math" panose="02040503050406030204" pitchFamily="18" charset="0"/>
                             </a:rPr>
-                            <m:t>𝐶</m:t>
+                            <m:t>C</m:t>
                           </m:r>
                         </m:e>
                         <m:sub>
                           <m:r>
-                            <a:rPr lang="en-US" b="0" i="1" smtClean="0">
+                            <m:rPr>
+                              <m:sty m:val="p"/>
+                            </m:rPr>
+                            <a:rPr lang="en-US" b="0" i="0" smtClean="0">
                               <a:latin typeface="Cambria Math" panose="02040503050406030204" pitchFamily="18" charset="0"/>
                             </a:rPr>
-                            <m:t>𝑎𝑑𝑣</m:t>
+                            <m:t>adv</m:t>
                           </m:r>
                         </m:sub>
                       </m:sSub>
@@ -33669,7 +33880,7 @@
             </p:txBody>
           </p:sp>
         </mc:Choice>
-        <mc:Fallback xmlns="">
+        <mc:Fallback>
           <p:sp>
             <p:nvSpPr>
               <p:cNvPr id="3" name="Объект 2"/>
@@ -40423,8 +40634,8 @@
           </a:p>
         </p:txBody>
       </p:sp>
-      <mc:AlternateContent xmlns:mc="http://schemas.openxmlformats.org/markup-compatibility/2006" xmlns:a14="http://schemas.microsoft.com/office/drawing/2010/main">
-        <mc:Choice Requires="a14">
+      <mc:AlternateContent xmlns:mc="http://schemas.openxmlformats.org/markup-compatibility/2006">
+        <mc:Choice xmlns:a14="http://schemas.microsoft.com/office/drawing/2010/main" Requires="a14">
           <p:sp>
             <p:nvSpPr>
               <p:cNvPr id="3" name="Объект 2"/>
@@ -40435,9 +40646,16 @@
                 <p:ph idx="1"/>
               </p:nvPr>
             </p:nvSpPr>
-            <p:spPr/>
+            <p:spPr>
+              <a:xfrm>
+                <a:off x="838200" y="1825625"/>
+                <a:ext cx="10515600" cy="4667250"/>
+              </a:xfrm>
+            </p:spPr>
             <p:txBody>
-              <a:bodyPr/>
+              <a:bodyPr>
+                <a:normAutofit fontScale="92500" lnSpcReduction="10000"/>
+              </a:bodyPr>
               <a:lstStyle/>
               <a:p>
                 <a:pPr marL="0" indent="0">
@@ -40498,7 +40716,7 @@
                 </a14:m>
                 <a:r>
                   <a:rPr lang="ru-RU" dirty="0"/>
-                  <a:t> перестановка </a:t>
+                  <a:t> подстановка </a:t>
                 </a:r>
                 <a14:m>
                   <m:oMath xmlns:m="http://schemas.openxmlformats.org/officeDocument/2006/math">
@@ -40579,7 +40797,15 @@
                 </a14:m>
                 <a:r>
                   <a:rPr lang="ru-RU" dirty="0"/>
-                  <a:t> должна быть псевдослучайной, т.е. выглядеть вычислительно неотличимой от случайной подстановки из </a:t>
+                  <a:t> должна быть </a:t>
+                </a:r>
+                <a:r>
+                  <a:rPr lang="ru-RU" b="1" dirty="0"/>
+                  <a:t>псевдослучайной</a:t>
+                </a:r>
+                <a:r>
+                  <a:rPr lang="ru-RU" dirty="0"/>
+                  <a:t>, т.е. выглядеть вычислительно неотличимой от случайной подстановки из </a:t>
                 </a:r>
                 <a14:m>
                   <m:oMath xmlns:m="http://schemas.openxmlformats.org/officeDocument/2006/math">
@@ -40625,22 +40851,66 @@
                   <a:buNone/>
                 </a:pPr>
                 <a:r>
+                  <a:rPr lang="ru-RU" b="1" dirty="0"/>
+                  <a:t>Идея игры </a:t>
+                </a:r>
+                <a:r>
                   <a:rPr lang="ru-RU" dirty="0"/>
-                  <a:t>Идея игры – противник эффективный противник имеет доступ к оракулу, который выбирает функцию </a:t>
+                  <a:t>– эффективный противник имеет доступ к оракулу, который выбирает </a:t>
+                </a:r>
+                <a:r>
+                  <a:rPr lang="ru-RU" b="1" dirty="0"/>
+                  <a:t>функцию </a:t>
                 </a:r>
                 <a14:m>
                   <m:oMath xmlns:m="http://schemas.openxmlformats.org/officeDocument/2006/math">
                     <m:r>
-                      <a:rPr lang="en-US" b="0" i="1" smtClean="0">
-                        <a:latin typeface="Cambria Math" panose="02040503050406030204" pitchFamily="18" charset="0"/>
-                      </a:rPr>
-                      <m:t>𝑓</m:t>
+                      <a:rPr lang="en-US" b="1" i="1" smtClean="0">
+                        <a:latin typeface="Cambria Math" panose="02040503050406030204" pitchFamily="18" charset="0"/>
+                      </a:rPr>
+                      <m:t>𝒇</m:t>
                     </m:r>
                   </m:oMath>
                 </a14:m>
                 <a:r>
+                  <a:rPr lang="ru-RU" b="1" dirty="0"/>
+                  <a:t> либо случайно</a:t>
+                </a:r>
+                <a:r>
                   <a:rPr lang="ru-RU" dirty="0"/>
-                  <a:t> либо случайно, либо использует псевдослучайную функцию на случайном ключе. Противник может получить произвольное число образов функции </a:t>
+                  <a:t>, </a:t>
+                </a:r>
+                <a:r>
+                  <a:rPr lang="ru-RU" b="1" dirty="0"/>
+                  <a:t>либо</a:t>
+                </a:r>
+                <a:r>
+                  <a:rPr lang="ru-RU" dirty="0"/>
+                  <a:t> использует </a:t>
+                </a:r>
+                <a:r>
+                  <a:rPr lang="ru-RU" b="1" dirty="0"/>
+                  <a:t>псевдослучайную</a:t>
+                </a:r>
+                <a:r>
+                  <a:rPr lang="ru-RU" dirty="0"/>
+                  <a:t> </a:t>
+                </a:r>
+                <a:r>
+                  <a:rPr lang="ru-RU" b="1" dirty="0"/>
+                  <a:t>функцию</a:t>
+                </a:r>
+                <a:r>
+                  <a:rPr lang="ru-RU" dirty="0"/>
+                  <a:t> на </a:t>
+                </a:r>
+                <a:r>
+                  <a:rPr lang="ru-RU" b="1" dirty="0"/>
+                  <a:t>случайном ключе</a:t>
+                </a:r>
+                <a:r>
+                  <a:rPr lang="ru-RU" dirty="0"/>
+                  <a:t>. Противник может получить произвольное число образов функции </a:t>
                 </a:r>
                 <a14:m>
                   <m:oMath xmlns:m="http://schemas.openxmlformats.org/officeDocument/2006/math">
@@ -40655,12 +40925,63 @@
                 <a:r>
                   <a:rPr lang="ru-RU" dirty="0"/>
                   <a:t> на указанных им входах. Задача – различить эксперименты описанной игры.</a:t>
+                </a:r>
+              </a:p>
+              <a:p>
+                <a:pPr marL="0" indent="0">
+                  <a:buNone/>
+                </a:pPr>
+                <a:endParaRPr lang="ru-RU" dirty="0"/>
+              </a:p>
+              <a:p>
+                <a:pPr marL="0" indent="0">
+                  <a:buNone/>
+                </a:pPr>
+                <a:r>
+                  <a:rPr lang="ru-RU" dirty="0"/>
+                  <a:t>Претендента, реализующего доступ противника к некоторой функции </a:t>
+                </a:r>
+                <a14:m>
+                  <m:oMath xmlns:m="http://schemas.openxmlformats.org/officeDocument/2006/math">
+                    <m:r>
+                      <a:rPr lang="en-US" b="0" i="1" smtClean="0">
+                        <a:latin typeface="Cambria Math" panose="02040503050406030204" pitchFamily="18" charset="0"/>
+                      </a:rPr>
+                      <m:t>𝑓</m:t>
+                    </m:r>
+                  </m:oMath>
+                </a14:m>
+                <a:r>
+                  <a:rPr lang="ru-RU" dirty="0"/>
+                  <a:t> называют </a:t>
+                </a:r>
+                <a:r>
+                  <a:rPr lang="ru-RU" b="1" dirty="0"/>
+                  <a:t>оракулом</a:t>
+                </a:r>
+                <a:r>
+                  <a:rPr lang="ru-RU" dirty="0"/>
+                  <a:t> функции </a:t>
+                </a:r>
+                <a14:m>
+                  <m:oMath xmlns:m="http://schemas.openxmlformats.org/officeDocument/2006/math">
+                    <m:r>
+                      <a:rPr lang="en-US" i="1" dirty="0" smtClean="0">
+                        <a:latin typeface="Cambria Math" panose="02040503050406030204" pitchFamily="18" charset="0"/>
+                      </a:rPr>
+                      <m:t>𝑓</m:t>
+                    </m:r>
+                  </m:oMath>
+                </a14:m>
+                <a:r>
+                  <a:rPr lang="ru-RU" dirty="0"/>
+                  <a:t>.</a:t>
                 </a:r>
               </a:p>
             </p:txBody>
           </p:sp>
         </mc:Choice>
-        <mc:Fallback xmlns="">
+        <mc:Fallback>
           <p:sp>
             <p:nvSpPr>
               <p:cNvPr id="3" name="Объект 2"/>
@@ -40672,10 +40993,14 @@
               </p:nvPr>
             </p:nvSpPr>
             <p:spPr>
+              <a:xfrm>
+                <a:off x="838200" y="1825625"/>
+                <a:ext cx="10515600" cy="4667250"/>
+              </a:xfrm>
               <a:blipFill>
                 <a:blip r:embed="rId2"/>
                 <a:stretch>
-                  <a:fillRect l="-1043" t="-2101" r="-1101"/>
+                  <a:fillRect l="-928" t="-2480" r="-696"/>
                 </a:stretch>
               </a:blipFill>
             </p:spPr>
@@ -41432,8 +41757,8 @@
           </a:p>
         </p:txBody>
       </p:sp>
-      <mc:AlternateContent xmlns:mc="http://schemas.openxmlformats.org/markup-compatibility/2006" xmlns:a14="http://schemas.microsoft.com/office/drawing/2010/main">
-        <mc:Choice Requires="a14">
+      <mc:AlternateContent xmlns:mc="http://schemas.openxmlformats.org/markup-compatibility/2006">
+        <mc:Choice xmlns:a14="http://schemas.microsoft.com/office/drawing/2010/main" Requires="a14">
           <p:sp>
             <p:nvSpPr>
               <p:cNvPr id="5" name="Rectangle 3"/>
@@ -41994,7 +42319,7 @@
                         <a:latin typeface="Cambria Math" panose="02040503050406030204" pitchFamily="18" charset="0"/>
                         <a:sym typeface="Symbol" pitchFamily="18" charset="2"/>
                       </a:rPr>
-                      <m:t>. </m:t>
+                      <m:t>,</m:t>
                     </m:r>
                     <m:r>
                       <a:rPr lang="en-US" b="0" i="1" smtClean="0">
@@ -42140,7 +42465,7 @@
             </p:txBody>
           </p:sp>
         </mc:Choice>
-        <mc:Fallback xmlns="">
+        <mc:Fallback>
           <p:sp>
             <p:nvSpPr>
               <p:cNvPr id="5" name="Rectangle 3"/>
@@ -42235,8 +42560,8 @@
           </a:p>
         </p:txBody>
       </p:sp>
-      <mc:AlternateContent xmlns:mc="http://schemas.openxmlformats.org/markup-compatibility/2006" xmlns:a14="http://schemas.microsoft.com/office/drawing/2010/main">
-        <mc:Choice Requires="a14">
+      <mc:AlternateContent xmlns:mc="http://schemas.openxmlformats.org/markup-compatibility/2006">
+        <mc:Choice xmlns:a14="http://schemas.microsoft.com/office/drawing/2010/main" Requires="a14">
           <p:sp>
             <p:nvSpPr>
               <p:cNvPr id="3" name="Объект 2"/>
@@ -42401,25 +42726,31 @@
                     <m:sSub>
                       <m:sSubPr>
                         <m:ctrlPr>
-                          <a:rPr lang="en-US" b="0" i="1" smtClean="0">
+                          <a:rPr lang="en-US" b="0" smtClean="0">
                             <a:latin typeface="Cambria Math" panose="02040503050406030204" pitchFamily="18" charset="0"/>
                           </a:rPr>
                         </m:ctrlPr>
                       </m:sSubPr>
                       <m:e>
                         <m:r>
-                          <a:rPr lang="en-US" b="0" i="1" smtClean="0">
-                            <a:latin typeface="Cambria Math" panose="02040503050406030204" pitchFamily="18" charset="0"/>
-                          </a:rPr>
-                          <m:t>𝑃𝑅𝐹</m:t>
+                          <m:rPr>
+                            <m:sty m:val="p"/>
+                          </m:rPr>
+                          <a:rPr lang="en-US" b="0" i="0" smtClean="0">
+                            <a:latin typeface="Cambria Math" panose="02040503050406030204" pitchFamily="18" charset="0"/>
+                          </a:rPr>
+                          <m:t>PRF</m:t>
                         </m:r>
                       </m:e>
                       <m:sub>
                         <m:r>
-                          <a:rPr lang="en-US" b="0" i="1" smtClean="0">
-                            <a:latin typeface="Cambria Math" panose="02040503050406030204" pitchFamily="18" charset="0"/>
-                          </a:rPr>
-                          <m:t>𝑎𝑑𝑣</m:t>
+                          <m:rPr>
+                            <m:sty m:val="p"/>
+                          </m:rPr>
+                          <a:rPr lang="en-US" b="0" i="0" smtClean="0">
+                            <a:latin typeface="Cambria Math" panose="02040503050406030204" pitchFamily="18" charset="0"/>
+                          </a:rPr>
+                          <m:t>adv</m:t>
                         </m:r>
                       </m:sub>
                     </m:sSub>
@@ -42588,7 +42919,7 @@
             </p:txBody>
           </p:sp>
         </mc:Choice>
-        <mc:Fallback xmlns="">
+        <mc:Fallback>
           <p:sp>
             <p:nvSpPr>
               <p:cNvPr id="3" name="Объект 2"/>
@@ -44788,8 +45119,8 @@
           </a:p>
         </p:txBody>
       </p:sp>
-      <mc:AlternateContent xmlns:mc="http://schemas.openxmlformats.org/markup-compatibility/2006" xmlns:a14="http://schemas.microsoft.com/office/drawing/2010/main">
-        <mc:Choice Requires="a14">
+      <mc:AlternateContent xmlns:mc="http://schemas.openxmlformats.org/markup-compatibility/2006">
+        <mc:Choice xmlns:a14="http://schemas.microsoft.com/office/drawing/2010/main" Requires="a14">
           <p:sp>
             <p:nvSpPr>
               <p:cNvPr id="3" name="Объект 2"/>
@@ -44934,25 +45265,31 @@
                     <m:sSub>
                       <m:sSubPr>
                         <m:ctrlPr>
-                          <a:rPr lang="en-US" b="0" i="1" smtClean="0">
+                          <a:rPr lang="en-US" b="0" smtClean="0">
                             <a:latin typeface="Cambria Math" panose="02040503050406030204" pitchFamily="18" charset="0"/>
                           </a:rPr>
                         </m:ctrlPr>
                       </m:sSubPr>
                       <m:e>
                         <m:r>
-                          <a:rPr lang="en-US" b="0" i="1" smtClean="0">
-                            <a:latin typeface="Cambria Math" panose="02040503050406030204" pitchFamily="18" charset="0"/>
-                          </a:rPr>
-                          <m:t>𝑃𝑅𝐹</m:t>
+                          <m:rPr>
+                            <m:sty m:val="p"/>
+                          </m:rPr>
+                          <a:rPr lang="en-US" b="0" i="0" smtClean="0">
+                            <a:latin typeface="Cambria Math" panose="02040503050406030204" pitchFamily="18" charset="0"/>
+                          </a:rPr>
+                          <m:t>PRF</m:t>
                         </m:r>
                       </m:e>
                       <m:sub>
                         <m:r>
-                          <a:rPr lang="en-US" b="0" i="1" smtClean="0">
-                            <a:latin typeface="Cambria Math" panose="02040503050406030204" pitchFamily="18" charset="0"/>
-                          </a:rPr>
-                          <m:t>𝑎𝑑𝑣</m:t>
+                          <m:rPr>
+                            <m:sty m:val="p"/>
+                          </m:rPr>
+                          <a:rPr lang="en-US" b="0" i="0" smtClean="0">
+                            <a:latin typeface="Cambria Math" panose="02040503050406030204" pitchFamily="18" charset="0"/>
+                          </a:rPr>
+                          <m:t>adv</m:t>
                         </m:r>
                       </m:sub>
                     </m:sSub>
@@ -45028,7 +45365,7 @@
             </p:txBody>
           </p:sp>
         </mc:Choice>
-        <mc:Fallback xmlns="">
+        <mc:Fallback>
           <p:sp>
             <p:nvSpPr>
               <p:cNvPr id="3" name="Объект 2"/>
@@ -46684,8 +47021,8 @@
           </p:sp>
         </mc:Fallback>
       </mc:AlternateContent>
-      <mc:AlternateContent xmlns:mc="http://schemas.openxmlformats.org/markup-compatibility/2006" xmlns:a14="http://schemas.microsoft.com/office/drawing/2010/main">
-        <mc:Choice Requires="a14">
+      <mc:AlternateContent xmlns:mc="http://schemas.openxmlformats.org/markup-compatibility/2006">
+        <mc:Choice xmlns:a14="http://schemas.microsoft.com/office/drawing/2010/main" Requires="a14">
           <p:sp>
             <p:nvSpPr>
               <p:cNvPr id="5" name="Прямоугольник 4"/>
@@ -46717,25 +47054,31 @@
                       <m:sSub>
                         <m:sSubPr>
                           <m:ctrlPr>
-                            <a:rPr lang="en-US" sz="2400" i="1" smtClean="0">
+                            <a:rPr lang="en-US" sz="2400" smtClean="0">
                               <a:latin typeface="Cambria Math" panose="02040503050406030204" pitchFamily="18" charset="0"/>
                             </a:rPr>
                           </m:ctrlPr>
                         </m:sSubPr>
                         <m:e>
                           <m:r>
-                            <a:rPr lang="en-US" sz="2400" b="0" i="1" smtClean="0">
+                            <m:rPr>
+                              <m:sty m:val="p"/>
+                            </m:rPr>
+                            <a:rPr lang="en-US" sz="2400" b="0" i="0" smtClean="0">
                               <a:latin typeface="Cambria Math" panose="02040503050406030204" pitchFamily="18" charset="0"/>
                             </a:rPr>
-                            <m:t>𝑃𝑅𝐹</m:t>
+                            <m:t>PRF</m:t>
                           </m:r>
                         </m:e>
                         <m:sub>
                           <m:r>
-                            <a:rPr lang="en-US" sz="2400" i="1">
+                            <m:rPr>
+                              <m:sty m:val="p"/>
+                            </m:rPr>
+                            <a:rPr lang="en-US" sz="2400" i="0">
                               <a:latin typeface="Cambria Math" panose="02040503050406030204" pitchFamily="18" charset="0"/>
                             </a:rPr>
-                            <m:t>𝑎𝑑𝑣</m:t>
+                            <m:t>adv</m:t>
                           </m:r>
                         </m:sub>
                       </m:sSub>
@@ -46896,7 +47239,7 @@
             </p:txBody>
           </p:sp>
         </mc:Choice>
-        <mc:Fallback xmlns="">
+        <mc:Fallback>
           <p:sp>
             <p:nvSpPr>
               <p:cNvPr id="5" name="Прямоугольник 4"/>
@@ -46916,7 +47259,7 @@
               <a:blipFill>
                 <a:blip r:embed="rId15"/>
                 <a:stretch>
-                  <a:fillRect r="-128" b="-17105"/>
+                  <a:fillRect b="-17105"/>
                 </a:stretch>
               </a:blipFill>
             </p:spPr>
@@ -46992,8 +47335,8 @@
           </a:p>
         </p:txBody>
       </p:sp>
-      <mc:AlternateContent xmlns:mc="http://schemas.openxmlformats.org/markup-compatibility/2006" xmlns:a14="http://schemas.microsoft.com/office/drawing/2010/main">
-        <mc:Choice Requires="a14">
+      <mc:AlternateContent xmlns:mc="http://schemas.openxmlformats.org/markup-compatibility/2006">
+        <mc:Choice xmlns:a14="http://schemas.microsoft.com/office/drawing/2010/main" Requires="a14">
           <p:sp>
             <p:nvSpPr>
               <p:cNvPr id="3" name="Объект 2"/>
@@ -47068,38 +47411,47 @@
                 <a14:m>
                   <m:oMath xmlns:m="http://schemas.openxmlformats.org/officeDocument/2006/math">
                     <m:r>
-                      <a:rPr lang="en-US" b="0" i="1" smtClean="0">
-                        <a:latin typeface="Cambria Math" panose="02040503050406030204" pitchFamily="18" charset="0"/>
-                      </a:rPr>
-                      <m:t>𝑃𝑅</m:t>
+                      <m:rPr>
+                        <m:sty m:val="p"/>
+                      </m:rPr>
+                      <a:rPr lang="en-US" b="0" i="0" smtClean="0">
+                        <a:latin typeface="Cambria Math" panose="02040503050406030204" pitchFamily="18" charset="0"/>
+                      </a:rPr>
+                      <m:t>PR</m:t>
                     </m:r>
                     <m:sSubSup>
                       <m:sSubSupPr>
                         <m:ctrlPr>
-                          <a:rPr lang="ru-RU" b="0" i="1" smtClean="0">
+                          <a:rPr lang="ru-RU" b="0" smtClean="0">
                             <a:latin typeface="Cambria Math" panose="02040503050406030204" pitchFamily="18" charset="0"/>
                           </a:rPr>
                         </m:ctrlPr>
                       </m:sSubSupPr>
                       <m:e>
                         <m:r>
-                          <a:rPr lang="en-US" b="0" i="1" smtClean="0">
-                            <a:latin typeface="Cambria Math" panose="02040503050406030204" pitchFamily="18" charset="0"/>
-                          </a:rPr>
-                          <m:t>𝐹</m:t>
+                          <m:rPr>
+                            <m:sty m:val="p"/>
+                          </m:rPr>
+                          <a:rPr lang="en-US" b="0" i="0" smtClean="0">
+                            <a:latin typeface="Cambria Math" panose="02040503050406030204" pitchFamily="18" charset="0"/>
+                          </a:rPr>
+                          <m:t>F</m:t>
                         </m:r>
                       </m:e>
                       <m:sub>
                         <m:r>
-                          <a:rPr lang="en-US" b="0" i="1" smtClean="0">
-                            <a:latin typeface="Cambria Math" panose="02040503050406030204" pitchFamily="18" charset="0"/>
-                          </a:rPr>
-                          <m:t>𝑎𝑑𝑣</m:t>
+                          <m:rPr>
+                            <m:sty m:val="p"/>
+                          </m:rPr>
+                          <a:rPr lang="en-US" b="0" i="0" smtClean="0">
+                            <a:latin typeface="Cambria Math" panose="02040503050406030204" pitchFamily="18" charset="0"/>
+                          </a:rPr>
+                          <m:t>adv</m:t>
                         </m:r>
                       </m:sub>
                       <m:sup>
                         <m:r>
-                          <a:rPr lang="ru-RU" b="0" i="1" smtClean="0">
+                          <a:rPr lang="ru-RU" b="0" i="0" smtClean="0">
                             <a:latin typeface="Cambria Math" panose="02040503050406030204" pitchFamily="18" charset="0"/>
                           </a:rPr>
                           <m:t>∗</m:t>
@@ -47294,30 +47646,36 @@
                     <m:sSubSup>
                       <m:sSubSupPr>
                         <m:ctrlPr>
-                          <a:rPr lang="en-US" b="0" i="1" smtClean="0">
+                          <a:rPr lang="en-US" b="0" smtClean="0">
                             <a:latin typeface="Cambria Math" panose="02040503050406030204" pitchFamily="18" charset="0"/>
                           </a:rPr>
                         </m:ctrlPr>
                       </m:sSubSupPr>
                       <m:e>
                         <m:r>
-                          <a:rPr lang="en-US" i="1">
-                            <a:latin typeface="Cambria Math" panose="02040503050406030204" pitchFamily="18" charset="0"/>
-                          </a:rPr>
-                          <m:t>𝑃𝑅𝐹</m:t>
+                          <m:rPr>
+                            <m:sty m:val="p"/>
+                          </m:rPr>
+                          <a:rPr lang="en-US" i="0">
+                            <a:latin typeface="Cambria Math" panose="02040503050406030204" pitchFamily="18" charset="0"/>
+                          </a:rPr>
+                          <m:t>PRF</m:t>
                         </m:r>
                       </m:e>
                       <m:sub>
                         <m:r>
-                          <a:rPr lang="en-US" i="1">
-                            <a:latin typeface="Cambria Math" panose="02040503050406030204" pitchFamily="18" charset="0"/>
-                          </a:rPr>
-                          <m:t>𝑎𝑑𝑣</m:t>
+                          <m:rPr>
+                            <m:sty m:val="p"/>
+                          </m:rPr>
+                          <a:rPr lang="en-US" i="0">
+                            <a:latin typeface="Cambria Math" panose="02040503050406030204" pitchFamily="18" charset="0"/>
+                          </a:rPr>
+                          <m:t>adv</m:t>
                         </m:r>
                       </m:sub>
                       <m:sup>
                         <m:r>
-                          <a:rPr lang="en-US" b="0" i="1" smtClean="0">
+                          <a:rPr lang="en-US" b="0" i="0" smtClean="0">
                             <a:latin typeface="Cambria Math" panose="02040503050406030204" pitchFamily="18" charset="0"/>
                           </a:rPr>
                           <m:t>∗</m:t>
@@ -47402,25 +47760,31 @@
                     <m:sSubSup>
                       <m:sSubSupPr>
                         <m:ctrlPr>
-                          <a:rPr lang="en-US" i="1">
+                          <a:rPr lang="en-US">
                             <a:latin typeface="Cambria Math" panose="02040503050406030204" pitchFamily="18" charset="0"/>
                           </a:rPr>
                         </m:ctrlPr>
                       </m:sSubSupPr>
                       <m:e>
                         <m:r>
-                          <a:rPr lang="en-US" i="1">
-                            <a:latin typeface="Cambria Math" panose="02040503050406030204" pitchFamily="18" charset="0"/>
-                          </a:rPr>
-                          <m:t>𝑃𝑅𝐹</m:t>
+                          <m:rPr>
+                            <m:sty m:val="p"/>
+                          </m:rPr>
+                          <a:rPr lang="en-US" i="0">
+                            <a:latin typeface="Cambria Math" panose="02040503050406030204" pitchFamily="18" charset="0"/>
+                          </a:rPr>
+                          <m:t>PRF</m:t>
                         </m:r>
                       </m:e>
                       <m:sub>
                         <m:r>
-                          <a:rPr lang="en-US" i="1">
-                            <a:latin typeface="Cambria Math" panose="02040503050406030204" pitchFamily="18" charset="0"/>
-                          </a:rPr>
-                          <m:t>𝑎𝑑𝑣</m:t>
+                          <m:rPr>
+                            <m:sty m:val="p"/>
+                          </m:rPr>
+                          <a:rPr lang="en-US" i="0">
+                            <a:latin typeface="Cambria Math" panose="02040503050406030204" pitchFamily="18" charset="0"/>
+                          </a:rPr>
+                          <m:t>adv</m:t>
                         </m:r>
                       </m:sub>
                       <m:sup/>
@@ -47465,30 +47829,36 @@
                     <m:sSubSup>
                       <m:sSubSupPr>
                         <m:ctrlPr>
-                          <a:rPr lang="en-US" i="1">
+                          <a:rPr lang="en-US">
                             <a:latin typeface="Cambria Math" panose="02040503050406030204" pitchFamily="18" charset="0"/>
                           </a:rPr>
                         </m:ctrlPr>
                       </m:sSubSupPr>
                       <m:e>
                         <m:r>
-                          <a:rPr lang="en-US" i="1">
-                            <a:latin typeface="Cambria Math" panose="02040503050406030204" pitchFamily="18" charset="0"/>
-                          </a:rPr>
-                          <m:t>𝑃𝑅𝐹</m:t>
+                          <m:rPr>
+                            <m:sty m:val="p"/>
+                          </m:rPr>
+                          <a:rPr lang="en-US" i="0">
+                            <a:latin typeface="Cambria Math" panose="02040503050406030204" pitchFamily="18" charset="0"/>
+                          </a:rPr>
+                          <m:t>PRF</m:t>
                         </m:r>
                       </m:e>
                       <m:sub>
                         <m:r>
-                          <a:rPr lang="en-US" i="1">
-                            <a:latin typeface="Cambria Math" panose="02040503050406030204" pitchFamily="18" charset="0"/>
-                          </a:rPr>
-                          <m:t>𝑎𝑑𝑣</m:t>
+                          <m:rPr>
+                            <m:sty m:val="p"/>
+                          </m:rPr>
+                          <a:rPr lang="en-US" i="0">
+                            <a:latin typeface="Cambria Math" panose="02040503050406030204" pitchFamily="18" charset="0"/>
+                          </a:rPr>
+                          <m:t>adv</m:t>
                         </m:r>
                       </m:sub>
                       <m:sup>
                         <m:r>
-                          <a:rPr lang="en-US" b="0" i="1" smtClean="0">
+                          <a:rPr lang="en-US" b="0" i="0" smtClean="0">
                             <a:latin typeface="Cambria Math" panose="02040503050406030204" pitchFamily="18" charset="0"/>
                           </a:rPr>
                           <m:t>∗</m:t>
@@ -47547,7 +47917,7 @@
             </p:txBody>
           </p:sp>
         </mc:Choice>
-        <mc:Fallback xmlns="">
+        <mc:Fallback>
           <p:sp>
             <p:nvSpPr>
               <p:cNvPr id="3" name="Объект 2"/>
@@ -47566,7 +47936,7 @@
               <a:blipFill>
                 <a:blip r:embed="rId2"/>
                 <a:stretch>
-                  <a:fillRect l="-1043" t="-3902" b="-2439"/>
+                  <a:fillRect l="-1043" t="-3902" b="-2927"/>
                 </a:stretch>
               </a:blipFill>
             </p:spPr>

--- a/Lectures/Lecture4.pptx
+++ b/Lectures/Lecture4.pptx
@@ -315,7 +315,7 @@
           <a:p>
             <a:fld id="{CBA08D16-15DC-4E25-BDC3-F25146157B16}" type="datetimeFigureOut">
               <a:rPr lang="ru-RU" smtClean="0"/>
-              <a:t>30.09.2026</a:t>
+              <a:t>01.10.2026</a:t>
             </a:fld>
             <a:endParaRPr lang="ru-RU"/>
           </a:p>
@@ -711,7 +711,7 @@
           <a:p>
             <a:fld id="{FCEC8293-DB51-454A-BE81-EC8FCB31EBA2}" type="datetime1">
               <a:rPr lang="ru-RU" smtClean="0"/>
-              <a:t>30.09.2026</a:t>
+              <a:t>01.10.2026</a:t>
             </a:fld>
             <a:endParaRPr lang="ru-RU"/>
           </a:p>
@@ -882,7 +882,7 @@
           <a:p>
             <a:fld id="{241C87B1-1C35-4DBD-BC18-2BC72E776603}" type="datetime1">
               <a:rPr lang="ru-RU" smtClean="0"/>
-              <a:t>30.09.2026</a:t>
+              <a:t>01.10.2026</a:t>
             </a:fld>
             <a:endParaRPr lang="ru-RU"/>
           </a:p>
@@ -1063,7 +1063,7 @@
           <a:p>
             <a:fld id="{3134C275-26C0-42CD-9111-9ADE65922AF9}" type="datetime1">
               <a:rPr lang="ru-RU" smtClean="0"/>
-              <a:t>30.09.2026</a:t>
+              <a:t>01.10.2026</a:t>
             </a:fld>
             <a:endParaRPr lang="ru-RU"/>
           </a:p>
@@ -1234,7 +1234,7 @@
           <a:p>
             <a:fld id="{C1A9A50B-C350-45F5-8AAB-ADB9E670AF2E}" type="datetime1">
               <a:rPr lang="ru-RU" smtClean="0"/>
-              <a:t>30.09.2026</a:t>
+              <a:t>01.10.2026</a:t>
             </a:fld>
             <a:endParaRPr lang="ru-RU"/>
           </a:p>
@@ -1482,7 +1482,7 @@
           <a:p>
             <a:fld id="{089688C9-348F-42F9-B6C0-5990DDE0C5B2}" type="datetime1">
               <a:rPr lang="ru-RU" smtClean="0"/>
-              <a:t>30.09.2026</a:t>
+              <a:t>01.10.2026</a:t>
             </a:fld>
             <a:endParaRPr lang="ru-RU"/>
           </a:p>
@@ -1714,7 +1714,7 @@
           <a:p>
             <a:fld id="{684AFD8F-6DD9-4AD3-A505-FDC3F5C5F3F6}" type="datetime1">
               <a:rPr lang="ru-RU" smtClean="0"/>
-              <a:t>30.09.2026</a:t>
+              <a:t>01.10.2026</a:t>
             </a:fld>
             <a:endParaRPr lang="ru-RU"/>
           </a:p>
@@ -2081,7 +2081,7 @@
           <a:p>
             <a:fld id="{63551EFE-4D02-45EB-A747-8B6F047B5AA0}" type="datetime1">
               <a:rPr lang="ru-RU" smtClean="0"/>
-              <a:t>30.09.2026</a:t>
+              <a:t>01.10.2026</a:t>
             </a:fld>
             <a:endParaRPr lang="ru-RU"/>
           </a:p>
@@ -2201,7 +2201,7 @@
           <a:p>
             <a:fld id="{813A9F34-E5CD-4B8F-AA9E-889C84372B20}" type="datetime1">
               <a:rPr lang="ru-RU" smtClean="0"/>
-              <a:t>30.09.2026</a:t>
+              <a:t>01.10.2026</a:t>
             </a:fld>
             <a:endParaRPr lang="ru-RU"/>
           </a:p>
@@ -2299,7 +2299,7 @@
           <a:p>
             <a:fld id="{51224D22-9B29-44A6-8E82-95FC492DEDC1}" type="datetime1">
               <a:rPr lang="ru-RU" smtClean="0"/>
-              <a:t>30.09.2026</a:t>
+              <a:t>01.10.2026</a:t>
             </a:fld>
             <a:endParaRPr lang="ru-RU"/>
           </a:p>
@@ -2577,7 +2577,7 @@
           <a:p>
             <a:fld id="{91D1034F-4441-48A1-BDC0-25EA1022324A}" type="datetime1">
               <a:rPr lang="ru-RU" smtClean="0"/>
-              <a:t>30.09.2026</a:t>
+              <a:t>01.10.2026</a:t>
             </a:fld>
             <a:endParaRPr lang="ru-RU"/>
           </a:p>
@@ -2832,7 +2832,7 @@
           <a:p>
             <a:fld id="{B0FFDE79-B627-473B-AE17-4C65BD2495F7}" type="datetime1">
               <a:rPr lang="ru-RU" smtClean="0"/>
-              <a:t>30.09.2026</a:t>
+              <a:t>01.10.2026</a:t>
             </a:fld>
             <a:endParaRPr lang="ru-RU"/>
           </a:p>
@@ -3046,7 +3046,7 @@
           <a:p>
             <a:fld id="{11CA537A-1B8C-47BA-9BA6-7CE3FAFDA8BE}" type="datetime1">
               <a:rPr lang="ru-RU" smtClean="0"/>
-              <a:t>30.09.2026</a:t>
+              <a:t>01.10.2026</a:t>
             </a:fld>
             <a:endParaRPr lang="ru-RU"/>
           </a:p>
@@ -3653,8 +3653,8 @@
           </a:p>
         </p:txBody>
       </p:sp>
-      <mc:AlternateContent xmlns:mc="http://schemas.openxmlformats.org/markup-compatibility/2006">
-        <mc:Choice xmlns:a14="http://schemas.microsoft.com/office/drawing/2010/main" Requires="a14">
+      <mc:AlternateContent xmlns:mc="http://schemas.openxmlformats.org/markup-compatibility/2006" xmlns:a14="http://schemas.microsoft.com/office/drawing/2010/main">
+        <mc:Choice Requires="a14">
           <p:sp>
             <p:nvSpPr>
               <p:cNvPr id="3" name="Объект 2"/>
@@ -4198,7 +4198,7 @@
                     <m:sSub>
                       <m:sSubPr>
                         <m:ctrlPr>
-                          <a:rPr lang="en-US" b="0" smtClean="0">
+                          <a:rPr lang="en-US" b="0" i="1" smtClean="0">
                             <a:latin typeface="Cambria Math" panose="02040503050406030204" pitchFamily="18" charset="0"/>
                           </a:rPr>
                         </m:ctrlPr>
@@ -4335,7 +4335,7 @@
             </p:txBody>
           </p:sp>
         </mc:Choice>
-        <mc:Fallback>
+        <mc:Fallback xmlns="">
           <p:sp>
             <p:nvSpPr>
               <p:cNvPr id="3" name="Объект 2"/>
@@ -4449,8 +4449,8 @@
           </a:p>
         </p:txBody>
       </p:sp>
-      <mc:AlternateContent xmlns:mc="http://schemas.openxmlformats.org/markup-compatibility/2006">
-        <mc:Choice xmlns:a14="http://schemas.microsoft.com/office/drawing/2010/main" Requires="a14">
+      <mc:AlternateContent xmlns:mc="http://schemas.openxmlformats.org/markup-compatibility/2006" xmlns:a14="http://schemas.microsoft.com/office/drawing/2010/main">
+        <mc:Choice Requires="a14">
           <p:sp>
             <p:nvSpPr>
               <p:cNvPr id="3" name="Объект 2"/>
@@ -4635,7 +4635,7 @@
                     <m:sSub>
                       <m:sSubPr>
                         <m:ctrlPr>
-                          <a:rPr lang="en-US" b="0" smtClean="0">
+                          <a:rPr lang="en-US" b="0" i="1" smtClean="0">
                             <a:latin typeface="Cambria Math" panose="02040503050406030204" pitchFamily="18" charset="0"/>
                           </a:rPr>
                         </m:ctrlPr>
@@ -4822,7 +4822,7 @@
             </p:txBody>
           </p:sp>
         </mc:Choice>
-        <mc:Fallback>
+        <mc:Fallback xmlns="">
           <p:sp>
             <p:nvSpPr>
               <p:cNvPr id="3" name="Объект 2"/>
@@ -7007,8 +7007,8 @@
           </a:p>
         </p:txBody>
       </p:sp>
-      <mc:AlternateContent xmlns:mc="http://schemas.openxmlformats.org/markup-compatibility/2006">
-        <mc:Choice xmlns:a14="http://schemas.microsoft.com/office/drawing/2010/main" Requires="a14">
+      <mc:AlternateContent xmlns:mc="http://schemas.openxmlformats.org/markup-compatibility/2006" xmlns:a14="http://schemas.microsoft.com/office/drawing/2010/main">
+        <mc:Choice Requires="a14">
           <p:sp>
             <p:nvSpPr>
               <p:cNvPr id="3" name="Объект 2"/>
@@ -7141,7 +7141,7 @@
                     <m:sSub>
                       <m:sSubPr>
                         <m:ctrlPr>
-                          <a:rPr lang="en-US" b="0" smtClean="0">
+                          <a:rPr lang="en-US" b="0" i="1" smtClean="0">
                             <a:latin typeface="Cambria Math" panose="02040503050406030204" pitchFamily="18" charset="0"/>
                           </a:rPr>
                         </m:ctrlPr>
@@ -7250,7 +7250,7 @@
             </p:txBody>
           </p:sp>
         </mc:Choice>
-        <mc:Fallback>
+        <mc:Fallback xmlns="">
           <p:sp>
             <p:nvSpPr>
               <p:cNvPr id="3" name="Объект 2"/>
@@ -8891,8 +8891,8 @@
           </p:sp>
         </mc:Fallback>
       </mc:AlternateContent>
-      <mc:AlternateContent xmlns:mc="http://schemas.openxmlformats.org/markup-compatibility/2006">
-        <mc:Choice xmlns:a14="http://schemas.microsoft.com/office/drawing/2010/main" Requires="a14">
+      <mc:AlternateContent xmlns:mc="http://schemas.openxmlformats.org/markup-compatibility/2006" xmlns:a14="http://schemas.microsoft.com/office/drawing/2010/main">
+        <mc:Choice Requires="a14">
           <p:sp>
             <p:nvSpPr>
               <p:cNvPr id="5" name="Прямоугольник 4"/>
@@ -8924,7 +8924,7 @@
                       <m:sSub>
                         <m:sSubPr>
                           <m:ctrlPr>
-                            <a:rPr lang="en-US" sz="2400" smtClean="0">
+                            <a:rPr lang="en-US" sz="2400" i="1" smtClean="0">
                               <a:latin typeface="Cambria Math" panose="02040503050406030204" pitchFamily="18" charset="0"/>
                             </a:rPr>
                           </m:ctrlPr>
@@ -9112,7 +9112,7 @@
             </p:txBody>
           </p:sp>
         </mc:Choice>
-        <mc:Fallback>
+        <mc:Fallback xmlns="">
           <p:sp>
             <p:nvSpPr>
               <p:cNvPr id="5" name="Прямоугольник 4"/>
@@ -9208,8 +9208,8 @@
           </a:p>
         </p:txBody>
       </p:sp>
-      <mc:AlternateContent xmlns:mc="http://schemas.openxmlformats.org/markup-compatibility/2006">
-        <mc:Choice xmlns:a14="http://schemas.microsoft.com/office/drawing/2010/main" Requires="a14">
+      <mc:AlternateContent xmlns:mc="http://schemas.openxmlformats.org/markup-compatibility/2006" xmlns:a14="http://schemas.microsoft.com/office/drawing/2010/main">
+        <mc:Choice Requires="a14">
           <p:sp>
             <p:nvSpPr>
               <p:cNvPr id="3" name="Объект 2"/>
@@ -9295,7 +9295,7 @@
                     <m:sSubSup>
                       <m:sSubSupPr>
                         <m:ctrlPr>
-                          <a:rPr lang="ru-RU" b="0" smtClean="0">
+                          <a:rPr lang="ru-RU" b="0" i="1" smtClean="0">
                             <a:latin typeface="Cambria Math" panose="02040503050406030204" pitchFamily="18" charset="0"/>
                           </a:rPr>
                         </m:ctrlPr>
@@ -9519,7 +9519,7 @@
                     <m:sSubSup>
                       <m:sSubSupPr>
                         <m:ctrlPr>
-                          <a:rPr lang="en-US" b="0" smtClean="0">
+                          <a:rPr lang="en-US" b="0" i="1" smtClean="0">
                             <a:latin typeface="Cambria Math" panose="02040503050406030204" pitchFamily="18" charset="0"/>
                           </a:rPr>
                         </m:ctrlPr>
@@ -9642,7 +9642,7 @@
                     <m:sSubSup>
                       <m:sSubSupPr>
                         <m:ctrlPr>
-                          <a:rPr lang="en-US">
+                          <a:rPr lang="en-US" i="1">
                             <a:latin typeface="Cambria Math" panose="02040503050406030204" pitchFamily="18" charset="0"/>
                           </a:rPr>
                         </m:ctrlPr>
@@ -9720,7 +9720,7 @@
                     <m:sSubSup>
                       <m:sSubSupPr>
                         <m:ctrlPr>
-                          <a:rPr lang="en-US">
+                          <a:rPr lang="en-US" i="1">
                             <a:latin typeface="Cambria Math" panose="02040503050406030204" pitchFamily="18" charset="0"/>
                           </a:rPr>
                         </m:ctrlPr>
@@ -9817,7 +9817,7 @@
             </p:txBody>
           </p:sp>
         </mc:Choice>
-        <mc:Fallback>
+        <mc:Fallback xmlns="">
           <p:sp>
             <p:nvSpPr>
               <p:cNvPr id="3" name="Объект 2"/>
@@ -11651,8 +11651,13 @@
                 </a14:m>
                 <a:r>
                   <a:rPr lang="ru-RU" dirty="0"/>
-                  <a:t> – стойкая псевдослучайная перестановка. </a:t>
-                </a:r>
+                  <a:t> – стойкая </a:t>
+                </a:r>
+                <a:r>
+                  <a:rPr lang="ru-RU"/>
+                  <a:t>псевдослучайная подстановка. </a:t>
+                </a:r>
+                <a:endParaRPr lang="ru-RU" dirty="0"/>
               </a:p>
               <a:p>
                 <a:pPr marL="0" indent="0">
@@ -11724,7 +11729,7 @@
                     <m:sSub>
                       <m:sSubPr>
                         <m:ctrlPr>
-                          <a:rPr lang="en-US" b="0" smtClean="0">
+                          <a:rPr lang="en-US" b="0" i="1" smtClean="0">
                             <a:latin typeface="Cambria Math" panose="02040503050406030204" pitchFamily="18" charset="0"/>
                           </a:rPr>
                         </m:ctrlPr>
@@ -11804,7 +11809,7 @@
                     <m:sSub>
                       <m:sSubPr>
                         <m:ctrlPr>
-                          <a:rPr lang="en-US" b="0" smtClean="0">
+                          <a:rPr lang="en-US" b="0" i="1" smtClean="0">
                             <a:latin typeface="Cambria Math" panose="02040503050406030204" pitchFamily="18" charset="0"/>
                           </a:rPr>
                         </m:ctrlPr>
@@ -13540,8 +13545,8 @@
           </p:sp>
         </mc:Fallback>
       </mc:AlternateContent>
-      <mc:AlternateContent xmlns:mc="http://schemas.openxmlformats.org/markup-compatibility/2006">
-        <mc:Choice xmlns:a14="http://schemas.microsoft.com/office/drawing/2010/main" Requires="a14">
+      <mc:AlternateContent xmlns:mc="http://schemas.openxmlformats.org/markup-compatibility/2006" xmlns:a14="http://schemas.microsoft.com/office/drawing/2010/main">
+        <mc:Choice Requires="a14">
           <p:sp>
             <p:nvSpPr>
               <p:cNvPr id="27" name="Прямоугольник 26"/>
@@ -13573,7 +13578,7 @@
                       <m:sSub>
                         <m:sSubPr>
                           <m:ctrlPr>
-                            <a:rPr lang="en-US" sz="2400" smtClean="0">
+                            <a:rPr lang="en-US" sz="2400" i="1" smtClean="0">
                               <a:latin typeface="Cambria Math" panose="02040503050406030204" pitchFamily="18" charset="0"/>
                             </a:rPr>
                           </m:ctrlPr>
@@ -13761,7 +13766,7 @@
             </p:txBody>
           </p:sp>
         </mc:Choice>
-        <mc:Fallback>
+        <mc:Fallback xmlns="">
           <p:sp>
             <p:nvSpPr>
               <p:cNvPr id="27" name="Прямоугольник 26"/>
@@ -15900,8 +15905,8 @@
           </p:sp>
         </mc:Fallback>
       </mc:AlternateContent>
-      <mc:AlternateContent xmlns:mc="http://schemas.openxmlformats.org/markup-compatibility/2006">
-        <mc:Choice xmlns:a14="http://schemas.microsoft.com/office/drawing/2010/main" Requires="a14">
+      <mc:AlternateContent xmlns:mc="http://schemas.openxmlformats.org/markup-compatibility/2006" xmlns:a14="http://schemas.microsoft.com/office/drawing/2010/main">
+        <mc:Choice Requires="a14">
           <p:sp>
             <p:nvSpPr>
               <p:cNvPr id="26" name="Прямоугольник 25"/>
@@ -15933,7 +15938,7 @@
                       <m:sSub>
                         <m:sSubPr>
                           <m:ctrlPr>
-                            <a:rPr lang="en-US" sz="2400" smtClean="0">
+                            <a:rPr lang="en-US" sz="2400" i="1" smtClean="0">
                               <a:latin typeface="Cambria Math" panose="02040503050406030204" pitchFamily="18" charset="0"/>
                             </a:rPr>
                           </m:ctrlPr>
@@ -16108,7 +16113,7 @@
             </p:txBody>
           </p:sp>
         </mc:Choice>
-        <mc:Fallback>
+        <mc:Fallback xmlns="">
           <p:sp>
             <p:nvSpPr>
               <p:cNvPr id="26" name="Прямоугольник 25"/>
@@ -16199,8 +16204,8 @@
           </a:p>
         </p:txBody>
       </p:sp>
-      <mc:AlternateContent xmlns:mc="http://schemas.openxmlformats.org/markup-compatibility/2006">
-        <mc:Choice xmlns:a14="http://schemas.microsoft.com/office/drawing/2010/main" Requires="a14">
+      <mc:AlternateContent xmlns:mc="http://schemas.openxmlformats.org/markup-compatibility/2006" xmlns:a14="http://schemas.microsoft.com/office/drawing/2010/main">
+        <mc:Choice Requires="a14">
           <p:sp>
             <p:nvSpPr>
               <p:cNvPr id="3" name="Объект 2"/>
@@ -16242,7 +16247,7 @@
                     <m:sSub>
                       <m:sSubPr>
                         <m:ctrlPr>
-                          <a:rPr lang="en-US" sz="2800">
+                          <a:rPr lang="en-US" sz="2800" i="1">
                             <a:latin typeface="Cambria Math" panose="02040503050406030204" pitchFamily="18" charset="0"/>
                           </a:rPr>
                         </m:ctrlPr>
@@ -16445,7 +16450,7 @@
             </p:txBody>
           </p:sp>
         </mc:Choice>
-        <mc:Fallback>
+        <mc:Fallback xmlns="">
           <p:sp>
             <p:nvSpPr>
               <p:cNvPr id="3" name="Объект 2"/>
@@ -17903,8 +17908,8 @@
           </p:sp>
         </mc:Fallback>
       </mc:AlternateContent>
-      <mc:AlternateContent xmlns:mc="http://schemas.openxmlformats.org/markup-compatibility/2006">
-        <mc:Choice xmlns:a14="http://schemas.microsoft.com/office/drawing/2010/main" Requires="a14">
+      <mc:AlternateContent xmlns:mc="http://schemas.openxmlformats.org/markup-compatibility/2006" xmlns:a14="http://schemas.microsoft.com/office/drawing/2010/main">
+        <mc:Choice Requires="a14">
           <p:sp>
             <p:nvSpPr>
               <p:cNvPr id="25" name="Прямоугольник 24"/>
@@ -17936,7 +17941,7 @@
                       <m:sSub>
                         <m:sSubPr>
                           <m:ctrlPr>
-                            <a:rPr lang="en-US" sz="2400" smtClean="0">
+                            <a:rPr lang="en-US" sz="2400" i="1" smtClean="0">
                               <a:latin typeface="Cambria Math" panose="02040503050406030204" pitchFamily="18" charset="0"/>
                             </a:rPr>
                           </m:ctrlPr>
@@ -18111,7 +18116,7 @@
             </p:txBody>
           </p:sp>
         </mc:Choice>
-        <mc:Fallback>
+        <mc:Fallback xmlns="">
           <p:sp>
             <p:nvSpPr>
               <p:cNvPr id="25" name="Прямоугольник 24"/>
@@ -18404,11 +18409,11 @@
                 </a14:m>
                 <a:r>
                   <a:rPr lang="en-US" dirty="0"/>
-                  <a:t> -</a:t>
+                  <a:t> </a:t>
                 </a:r>
                 <a:r>
                   <a:rPr lang="ru-RU" dirty="0"/>
-                  <a:t> </a:t>
+                  <a:t>– </a:t>
                 </a:r>
                 <a:r>
                   <a:rPr lang="ru-RU" dirty="0" err="1"/>
@@ -18492,7 +18497,7 @@
                     <m:sSub>
                       <m:sSubPr>
                         <m:ctrlPr>
-                          <a:rPr lang="en-US" b="0" smtClean="0">
+                          <a:rPr lang="en-US" b="0" i="1" smtClean="0">
                             <a:latin typeface="Cambria Math" panose="02040503050406030204" pitchFamily="18" charset="0"/>
                           </a:rPr>
                         </m:ctrlPr>
@@ -20463,8 +20468,8 @@
             </a:p>
           </p:txBody>
         </p:sp>
-        <mc:AlternateContent xmlns:mc="http://schemas.openxmlformats.org/markup-compatibility/2006">
-          <mc:Choice xmlns:a14="http://schemas.microsoft.com/office/drawing/2010/main" Requires="a14">
+        <mc:AlternateContent xmlns:mc="http://schemas.openxmlformats.org/markup-compatibility/2006" xmlns:a14="http://schemas.microsoft.com/office/drawing/2010/main">
+          <mc:Choice Requires="a14">
             <p:sp>
               <p:nvSpPr>
                 <p:cNvPr id="73" name="Text Box 14"/>
@@ -20588,7 +20593,7 @@
               </p:txBody>
             </p:sp>
           </mc:Choice>
-          <mc:Fallback>
+          <mc:Fallback xmlns="">
             <p:sp>
               <p:nvSpPr>
                 <p:cNvPr id="73" name="Text Box 14"/>
@@ -22161,7 +22166,7 @@
                     <m:sSub>
                       <m:sSubPr>
                         <m:ctrlPr>
-                          <a:rPr lang="en-US" b="0" dirty="0" smtClean="0">
+                          <a:rPr lang="en-US" b="0" i="1" dirty="0" smtClean="0">
                             <a:latin typeface="Cambria Math" panose="02040503050406030204" pitchFamily="18" charset="0"/>
                           </a:rPr>
                         </m:ctrlPr>
@@ -22194,7 +22199,7 @@
                         <m:begChr m:val="["/>
                         <m:endChr m:val="]"/>
                         <m:ctrlPr>
-                          <a:rPr lang="en-US" b="0" dirty="0" smtClean="0">
+                          <a:rPr lang="en-US" b="0" i="1" dirty="0" smtClean="0">
                             <a:latin typeface="Cambria Math" panose="02040503050406030204" pitchFamily="18" charset="0"/>
                           </a:rPr>
                         </m:ctrlPr>
@@ -22455,7 +22460,15 @@
                 </a14:m>
                 <a:r>
                   <a:rPr lang="en-US" dirty="0"/>
-                  <a:t> - </a:t>
+                  <a:t> </a:t>
+                </a:r>
+                <a:r>
+                  <a:rPr lang="ru-RU" dirty="0"/>
+                  <a:t>–</a:t>
+                </a:r>
+                <a:r>
+                  <a:rPr lang="en-US" dirty="0"/>
+                  <a:t> </a:t>
                 </a:r>
                 <a:r>
                   <a:rPr lang="ru-RU" dirty="0"/>
@@ -24354,8 +24367,8 @@
             </a:p>
           </p:txBody>
         </p:sp>
-        <mc:AlternateContent xmlns:mc="http://schemas.openxmlformats.org/markup-compatibility/2006">
-          <mc:Choice xmlns:a14="http://schemas.microsoft.com/office/drawing/2010/main" Requires="a14">
+        <mc:AlternateContent xmlns:mc="http://schemas.openxmlformats.org/markup-compatibility/2006" xmlns:a14="http://schemas.microsoft.com/office/drawing/2010/main">
+          <mc:Choice Requires="a14">
             <p:sp>
               <p:nvSpPr>
                 <p:cNvPr id="73" name="Text Box 14"/>
@@ -24479,7 +24492,7 @@
               </p:txBody>
             </p:sp>
           </mc:Choice>
-          <mc:Fallback>
+          <mc:Fallback xmlns="">
             <p:sp>
               <p:nvSpPr>
                 <p:cNvPr id="73" name="Text Box 14"/>
@@ -25195,11 +25208,11 @@
                 </a14:m>
                 <a:r>
                   <a:rPr lang="en-US" dirty="0"/>
-                  <a:t> -</a:t>
+                  <a:t> </a:t>
                 </a:r>
                 <a:r>
                   <a:rPr lang="ru-RU" dirty="0"/>
-                  <a:t> </a:t>
+                  <a:t>– </a:t>
                 </a:r>
                 <a:r>
                   <a:rPr lang="ru-RU" dirty="0" err="1"/>
@@ -25246,7 +25259,7 @@
                     <m:sSub>
                       <m:sSubPr>
                         <m:ctrlPr>
-                          <a:rPr lang="en-US" b="0" smtClean="0">
+                          <a:rPr lang="en-US" b="0" i="1" smtClean="0">
                             <a:latin typeface="Cambria Math" panose="02040503050406030204" pitchFamily="18" charset="0"/>
                           </a:rPr>
                         </m:ctrlPr>
@@ -26314,7 +26327,7 @@
                 </a14:m>
                 <a:r>
                   <a:rPr lang="ru-RU" dirty="0"/>
-                  <a:t> - подстановки на множестве </a:t>
+                  <a:t> – подстановки на множестве </a:t>
                 </a:r>
                 <a14:m>
                   <m:oMath xmlns:m="http://schemas.openxmlformats.org/officeDocument/2006/math">
@@ -28404,8 +28417,8 @@
           </p:sp>
         </mc:Fallback>
       </mc:AlternateContent>
-      <mc:AlternateContent xmlns:mc="http://schemas.openxmlformats.org/markup-compatibility/2006">
-        <mc:Choice xmlns:a14="http://schemas.microsoft.com/office/drawing/2010/main" Requires="a14">
+      <mc:AlternateContent xmlns:mc="http://schemas.openxmlformats.org/markup-compatibility/2006" xmlns:a14="http://schemas.microsoft.com/office/drawing/2010/main">
+        <mc:Choice Requires="a14">
           <p:sp>
             <p:nvSpPr>
               <p:cNvPr id="25" name="Прямоугольник 24"/>
@@ -28437,7 +28450,7 @@
                       <m:sSub>
                         <m:sSubPr>
                           <m:ctrlPr>
-                            <a:rPr lang="en-US" sz="2400" smtClean="0">
+                            <a:rPr lang="en-US" sz="2400" i="1" smtClean="0">
                               <a:latin typeface="Cambria Math" panose="02040503050406030204" pitchFamily="18" charset="0"/>
                             </a:rPr>
                           </m:ctrlPr>
@@ -28552,7 +28565,7 @@
             </p:txBody>
           </p:sp>
         </mc:Choice>
-        <mc:Fallback>
+        <mc:Fallback xmlns="">
           <p:sp>
             <p:nvSpPr>
               <p:cNvPr id="25" name="Прямоугольник 24"/>
@@ -28643,8 +28656,8 @@
           </a:p>
         </p:txBody>
       </p:sp>
-      <mc:AlternateContent xmlns:mc="http://schemas.openxmlformats.org/markup-compatibility/2006">
-        <mc:Choice xmlns:a14="http://schemas.microsoft.com/office/drawing/2010/main" Requires="a14">
+      <mc:AlternateContent xmlns:mc="http://schemas.openxmlformats.org/markup-compatibility/2006" xmlns:a14="http://schemas.microsoft.com/office/drawing/2010/main">
+        <mc:Choice Requires="a14">
           <p:sp>
             <p:nvSpPr>
               <p:cNvPr id="3" name="Объект 2"/>
@@ -28686,7 +28699,7 @@
                     <m:sSub>
                       <m:sSubPr>
                         <m:ctrlPr>
-                          <a:rPr lang="en-US" sz="2800">
+                          <a:rPr lang="en-US" sz="2800" i="1">
                             <a:latin typeface="Cambria Math" panose="02040503050406030204" pitchFamily="18" charset="0"/>
                           </a:rPr>
                         </m:ctrlPr>
@@ -28832,7 +28845,7 @@
             </p:txBody>
           </p:sp>
         </mc:Choice>
-        <mc:Fallback>
+        <mc:Fallback xmlns="">
           <p:sp>
             <p:nvSpPr>
               <p:cNvPr id="3" name="Объект 2"/>
@@ -30247,8 +30260,8 @@
           </p:sp>
         </mc:Fallback>
       </mc:AlternateContent>
-      <mc:AlternateContent xmlns:mc="http://schemas.openxmlformats.org/markup-compatibility/2006">
-        <mc:Choice xmlns:a14="http://schemas.microsoft.com/office/drawing/2010/main" Requires="a14">
+      <mc:AlternateContent xmlns:mc="http://schemas.openxmlformats.org/markup-compatibility/2006" xmlns:a14="http://schemas.microsoft.com/office/drawing/2010/main">
+        <mc:Choice Requires="a14">
           <p:sp>
             <p:nvSpPr>
               <p:cNvPr id="25" name="Прямоугольник 24"/>
@@ -30280,7 +30293,7 @@
                       <m:sSub>
                         <m:sSubPr>
                           <m:ctrlPr>
-                            <a:rPr lang="en-US" sz="2400" smtClean="0">
+                            <a:rPr lang="en-US" sz="2400" i="1" smtClean="0">
                               <a:latin typeface="Cambria Math" panose="02040503050406030204" pitchFamily="18" charset="0"/>
                             </a:rPr>
                           </m:ctrlPr>
@@ -30395,7 +30408,7 @@
             </p:txBody>
           </p:sp>
         </mc:Choice>
-        <mc:Fallback>
+        <mc:Fallback xmlns="">
           <p:sp>
             <p:nvSpPr>
               <p:cNvPr id="25" name="Прямоугольник 24"/>
@@ -30950,7 +30963,7 @@
                 </a14:m>
                 <a:r>
                   <a:rPr lang="ru-RU" dirty="0"/>
-                  <a:t> - сверх- полиномиальная</a:t>
+                  <a:t> – сверх- полиномиальная</a:t>
                 </a:r>
               </a:p>
               <a:p>
@@ -30986,7 +30999,7 @@
                     <m:sSub>
                       <m:sSubPr>
                         <m:ctrlPr>
-                          <a:rPr lang="en-US" b="0" smtClean="0">
+                          <a:rPr lang="en-US" b="0" i="1" smtClean="0">
                             <a:latin typeface="Cambria Math" panose="02040503050406030204" pitchFamily="18" charset="0"/>
                           </a:rPr>
                         </m:ctrlPr>
@@ -31096,7 +31109,7 @@
                 </a14:m>
                 <a:r>
                   <a:rPr lang="ru-RU" dirty="0"/>
-                  <a:t> - должна быть пренебрежимо малой, </a:t>
+                  <a:t> должна быть пренебрежимо малой, </a:t>
                 </a:r>
                 <a14:m>
                   <m:oMath xmlns:m="http://schemas.openxmlformats.org/officeDocument/2006/math">
@@ -31122,7 +31135,7 @@
                 </a14:m>
                 <a:r>
                   <a:rPr lang="ru-RU" dirty="0"/>
-                  <a:t> - </a:t>
+                  <a:t> – </a:t>
                 </a:r>
                 <a:r>
                   <a:rPr lang="ru-RU" dirty="0" err="1"/>
@@ -33069,7 +33082,9 @@
             </p:nvSpPr>
             <p:spPr/>
             <p:txBody>
-              <a:bodyPr/>
+              <a:bodyPr>
+                <a:normAutofit lnSpcReduction="10000"/>
+              </a:bodyPr>
               <a:lstStyle/>
               <a:p>
                 <a:pPr marL="0" indent="0">
@@ -33497,7 +33512,7 @@
                 </a14:m>
                 <a:r>
                   <a:rPr lang="ru-RU" dirty="0"/>
-                  <a:t> - сообщения, длины не более  чем из </a:t>
+                  <a:t> – сообщения, длины не более  чем из </a:t>
                 </a:r>
                 <a14:m>
                   <m:oMath xmlns:m="http://schemas.openxmlformats.org/officeDocument/2006/math">
@@ -33559,7 +33574,7 @@
                 </a14:m>
                 <a:r>
                   <a:rPr lang="ru-RU" dirty="0"/>
-                  <a:t> - семантически стойкий. В частности </a:t>
+                  <a:t> – семантически стойкий. В частности </a:t>
                 </a:r>
                 <a14:m>
                   <m:oMath xmlns:m="http://schemas.openxmlformats.org/officeDocument/2006/math">
@@ -33652,7 +33667,7 @@
                       <m:sSub>
                         <m:sSubPr>
                           <m:ctrlPr>
-                            <a:rPr lang="en-US" b="0" smtClean="0">
+                            <a:rPr lang="en-US" b="0" i="1" smtClean="0">
                               <a:latin typeface="Cambria Math" panose="02040503050406030204" pitchFamily="18" charset="0"/>
                             </a:rPr>
                           </m:ctrlPr>
@@ -33751,7 +33766,7 @@
                       <m:sSub>
                         <m:sSubPr>
                           <m:ctrlPr>
-                            <a:rPr lang="en-US" b="0" smtClean="0">
+                            <a:rPr lang="en-US" b="0" i="1" smtClean="0">
                               <a:latin typeface="Cambria Math" panose="02040503050406030204" pitchFamily="18" charset="0"/>
                             </a:rPr>
                           </m:ctrlPr>
@@ -33895,7 +33910,7 @@
               <a:blipFill>
                 <a:blip r:embed="rId2"/>
                 <a:stretch>
-                  <a:fillRect l="-1043" t="-2101" r="-1449"/>
+                  <a:fillRect l="-1043" t="-2801"/>
                 </a:stretch>
               </a:blipFill>
             </p:spPr>
@@ -39946,8 +39961,8 @@
           </a:p>
         </p:txBody>
       </p:sp>
-      <mc:AlternateContent xmlns:mc="http://schemas.openxmlformats.org/markup-compatibility/2006" xmlns:a14="http://schemas.microsoft.com/office/drawing/2010/main">
-        <mc:Choice Requires="a14">
+      <mc:AlternateContent xmlns:mc="http://schemas.openxmlformats.org/markup-compatibility/2006">
+        <mc:Choice xmlns:a14="http://schemas.microsoft.com/office/drawing/2010/main" Requires="a14">
           <p:sp>
             <p:nvSpPr>
               <p:cNvPr id="3" name="Объект 2"/>
@@ -39971,7 +39986,7 @@
               <a:p>
                 <a:r>
                   <a:rPr lang="ru-RU" dirty="0"/>
-                  <a:t>Раундовая функция должна быть сильно нелинейной от ключа, т.к. использование линейной функции (или близкой к линейной) даёт линейный блочный шифр. Пример плохой раундовой функции - </a:t>
+                  <a:t>Раундовая функция должна быть сильно нелинейной от ключа, т.к. использование линейной функции (или близкой к линейной) даёт линейный блочный шифр. Пример плохой раундовой функции – </a:t>
                 </a:r>
                 <a14:m>
                   <m:oMath xmlns:m="http://schemas.openxmlformats.org/officeDocument/2006/math">
@@ -40091,7 +40106,7 @@
             </p:txBody>
           </p:sp>
         </mc:Choice>
-        <mc:Fallback xmlns="">
+        <mc:Fallback>
           <p:sp>
             <p:nvSpPr>
               <p:cNvPr id="3" name="Объект 2"/>
@@ -40634,8 +40649,8 @@
           </a:p>
         </p:txBody>
       </p:sp>
-      <mc:AlternateContent xmlns:mc="http://schemas.openxmlformats.org/markup-compatibility/2006">
-        <mc:Choice xmlns:a14="http://schemas.microsoft.com/office/drawing/2010/main" Requires="a14">
+      <mc:AlternateContent xmlns:mc="http://schemas.openxmlformats.org/markup-compatibility/2006" xmlns:a14="http://schemas.microsoft.com/office/drawing/2010/main">
+        <mc:Choice Requires="a14">
           <p:sp>
             <p:nvSpPr>
               <p:cNvPr id="3" name="Объект 2"/>
@@ -40981,7 +40996,7 @@
             </p:txBody>
           </p:sp>
         </mc:Choice>
-        <mc:Fallback>
+        <mc:Fallback xmlns="">
           <p:sp>
             <p:nvSpPr>
               <p:cNvPr id="3" name="Объект 2"/>
@@ -41757,8 +41772,8 @@
           </a:p>
         </p:txBody>
       </p:sp>
-      <mc:AlternateContent xmlns:mc="http://schemas.openxmlformats.org/markup-compatibility/2006">
-        <mc:Choice xmlns:a14="http://schemas.microsoft.com/office/drawing/2010/main" Requires="a14">
+      <mc:AlternateContent xmlns:mc="http://schemas.openxmlformats.org/markup-compatibility/2006" xmlns:a14="http://schemas.microsoft.com/office/drawing/2010/main">
+        <mc:Choice Requires="a14">
           <p:sp>
             <p:nvSpPr>
               <p:cNvPr id="5" name="Rectangle 3"/>
@@ -42465,7 +42480,7 @@
             </p:txBody>
           </p:sp>
         </mc:Choice>
-        <mc:Fallback>
+        <mc:Fallback xmlns="">
           <p:sp>
             <p:nvSpPr>
               <p:cNvPr id="5" name="Rectangle 3"/>
@@ -42560,8 +42575,8 @@
           </a:p>
         </p:txBody>
       </p:sp>
-      <mc:AlternateContent xmlns:mc="http://schemas.openxmlformats.org/markup-compatibility/2006">
-        <mc:Choice xmlns:a14="http://schemas.microsoft.com/office/drawing/2010/main" Requires="a14">
+      <mc:AlternateContent xmlns:mc="http://schemas.openxmlformats.org/markup-compatibility/2006" xmlns:a14="http://schemas.microsoft.com/office/drawing/2010/main">
+        <mc:Choice Requires="a14">
           <p:sp>
             <p:nvSpPr>
               <p:cNvPr id="3" name="Объект 2"/>
@@ -42726,7 +42741,7 @@
                     <m:sSub>
                       <m:sSubPr>
                         <m:ctrlPr>
-                          <a:rPr lang="en-US" b="0" smtClean="0">
+                          <a:rPr lang="en-US" b="0" i="1" smtClean="0">
                             <a:latin typeface="Cambria Math" panose="02040503050406030204" pitchFamily="18" charset="0"/>
                           </a:rPr>
                         </m:ctrlPr>
@@ -42919,7 +42934,7 @@
             </p:txBody>
           </p:sp>
         </mc:Choice>
-        <mc:Fallback>
+        <mc:Fallback xmlns="">
           <p:sp>
             <p:nvSpPr>
               <p:cNvPr id="3" name="Объект 2"/>
@@ -45119,8 +45134,8 @@
           </a:p>
         </p:txBody>
       </p:sp>
-      <mc:AlternateContent xmlns:mc="http://schemas.openxmlformats.org/markup-compatibility/2006">
-        <mc:Choice xmlns:a14="http://schemas.microsoft.com/office/drawing/2010/main" Requires="a14">
+      <mc:AlternateContent xmlns:mc="http://schemas.openxmlformats.org/markup-compatibility/2006" xmlns:a14="http://schemas.microsoft.com/office/drawing/2010/main">
+        <mc:Choice Requires="a14">
           <p:sp>
             <p:nvSpPr>
               <p:cNvPr id="3" name="Объект 2"/>
@@ -45265,7 +45280,7 @@
                     <m:sSub>
                       <m:sSubPr>
                         <m:ctrlPr>
-                          <a:rPr lang="en-US" b="0" smtClean="0">
+                          <a:rPr lang="en-US" b="0" i="1" smtClean="0">
                             <a:latin typeface="Cambria Math" panose="02040503050406030204" pitchFamily="18" charset="0"/>
                           </a:rPr>
                         </m:ctrlPr>
@@ -45365,7 +45380,7 @@
             </p:txBody>
           </p:sp>
         </mc:Choice>
-        <mc:Fallback>
+        <mc:Fallback xmlns="">
           <p:sp>
             <p:nvSpPr>
               <p:cNvPr id="3" name="Объект 2"/>
@@ -47021,8 +47036,8 @@
           </p:sp>
         </mc:Fallback>
       </mc:AlternateContent>
-      <mc:AlternateContent xmlns:mc="http://schemas.openxmlformats.org/markup-compatibility/2006">
-        <mc:Choice xmlns:a14="http://schemas.microsoft.com/office/drawing/2010/main" Requires="a14">
+      <mc:AlternateContent xmlns:mc="http://schemas.openxmlformats.org/markup-compatibility/2006" xmlns:a14="http://schemas.microsoft.com/office/drawing/2010/main">
+        <mc:Choice Requires="a14">
           <p:sp>
             <p:nvSpPr>
               <p:cNvPr id="5" name="Прямоугольник 4"/>
@@ -47054,7 +47069,7 @@
                       <m:sSub>
                         <m:sSubPr>
                           <m:ctrlPr>
-                            <a:rPr lang="en-US" sz="2400" smtClean="0">
+                            <a:rPr lang="en-US" sz="2400" i="1" smtClean="0">
                               <a:latin typeface="Cambria Math" panose="02040503050406030204" pitchFamily="18" charset="0"/>
                             </a:rPr>
                           </m:ctrlPr>
@@ -47239,7 +47254,7 @@
             </p:txBody>
           </p:sp>
         </mc:Choice>
-        <mc:Fallback>
+        <mc:Fallback xmlns="">
           <p:sp>
             <p:nvSpPr>
               <p:cNvPr id="5" name="Прямоугольник 4"/>
@@ -47335,8 +47350,8 @@
           </a:p>
         </p:txBody>
       </p:sp>
-      <mc:AlternateContent xmlns:mc="http://schemas.openxmlformats.org/markup-compatibility/2006">
-        <mc:Choice xmlns:a14="http://schemas.microsoft.com/office/drawing/2010/main" Requires="a14">
+      <mc:AlternateContent xmlns:mc="http://schemas.openxmlformats.org/markup-compatibility/2006" xmlns:a14="http://schemas.microsoft.com/office/drawing/2010/main">
+        <mc:Choice Requires="a14">
           <p:sp>
             <p:nvSpPr>
               <p:cNvPr id="3" name="Объект 2"/>
@@ -47422,7 +47437,7 @@
                     <m:sSubSup>
                       <m:sSubSupPr>
                         <m:ctrlPr>
-                          <a:rPr lang="ru-RU" b="0" smtClean="0">
+                          <a:rPr lang="ru-RU" b="0" i="1" smtClean="0">
                             <a:latin typeface="Cambria Math" panose="02040503050406030204" pitchFamily="18" charset="0"/>
                           </a:rPr>
                         </m:ctrlPr>
@@ -47646,7 +47661,7 @@
                     <m:sSubSup>
                       <m:sSubSupPr>
                         <m:ctrlPr>
-                          <a:rPr lang="en-US" b="0" smtClean="0">
+                          <a:rPr lang="en-US" b="0" i="1" smtClean="0">
                             <a:latin typeface="Cambria Math" panose="02040503050406030204" pitchFamily="18" charset="0"/>
                           </a:rPr>
                         </m:ctrlPr>
@@ -47760,7 +47775,7 @@
                     <m:sSubSup>
                       <m:sSubSupPr>
                         <m:ctrlPr>
-                          <a:rPr lang="en-US">
+                          <a:rPr lang="en-US" i="1">
                             <a:latin typeface="Cambria Math" panose="02040503050406030204" pitchFamily="18" charset="0"/>
                           </a:rPr>
                         </m:ctrlPr>
@@ -47829,7 +47844,7 @@
                     <m:sSubSup>
                       <m:sSubSupPr>
                         <m:ctrlPr>
-                          <a:rPr lang="en-US">
+                          <a:rPr lang="en-US" i="1">
                             <a:latin typeface="Cambria Math" panose="02040503050406030204" pitchFamily="18" charset="0"/>
                           </a:rPr>
                         </m:ctrlPr>
@@ -47917,7 +47932,7 @@
             </p:txBody>
           </p:sp>
         </mc:Choice>
-        <mc:Fallback>
+        <mc:Fallback xmlns="">
           <p:sp>
             <p:nvSpPr>
               <p:cNvPr id="3" name="Объект 2"/>
